--- a/pl/materials/cie-maths-5/week-7-6-3-equivalence-and-comparison-8-1-addition-and-subtraction/1. 6Nf.04 Recognise that fractions, decimals and percentages can have equivalent values..pptx
+++ b/pl/materials/cie-maths-5/week-7-6-3-equivalence-and-comparison-8-1-addition-and-subtraction/1. 6Nf.04 Recognise that fractions, decimals and percentages can have equivalent values..pptx
@@ -17,12 +17,13 @@
     <p:sldId id="266" r:id="rId11"/>
     <p:sldId id="274" r:id="rId12"/>
     <p:sldId id="267" r:id="rId13"/>
-    <p:sldId id="268" r:id="rId14"/>
-    <p:sldId id="269" r:id="rId15"/>
-    <p:sldId id="270" r:id="rId16"/>
-    <p:sldId id="271" r:id="rId17"/>
-    <p:sldId id="272" r:id="rId18"/>
-    <p:sldId id="273" r:id="rId19"/>
+    <p:sldId id="275" r:id="rId14"/>
+    <p:sldId id="268" r:id="rId15"/>
+    <p:sldId id="269" r:id="rId16"/>
+    <p:sldId id="270" r:id="rId17"/>
+    <p:sldId id="271" r:id="rId18"/>
+    <p:sldId id="272" r:id="rId19"/>
+    <p:sldId id="273" r:id="rId20"/>
   </p:sldIdLst>
   <p:sldSz cx="12192000" cy="6858000"/>
   <p:notesSz cx="6858000" cy="9144000"/>
@@ -258,7 +259,7 @@
           <a:p>
             <a:fld id="{95CACCF8-B847-4313-84B2-1F43B9B3848F}" type="datetimeFigureOut">
               <a:rPr lang="en-US" smtClean="0"/>
-              <a:t>9/29/2026</a:t>
+              <a:t>10/1/2026</a:t>
             </a:fld>
             <a:endParaRPr lang="en-US"/>
           </a:p>
@@ -426,7 +427,7 @@
           <a:p>
             <a:fld id="{95CACCF8-B847-4313-84B2-1F43B9B3848F}" type="datetimeFigureOut">
               <a:rPr lang="en-US" smtClean="0"/>
-              <a:t>9/29/2026</a:t>
+              <a:t>10/1/2026</a:t>
             </a:fld>
             <a:endParaRPr lang="en-US"/>
           </a:p>
@@ -604,7 +605,7 @@
           <a:p>
             <a:fld id="{95CACCF8-B847-4313-84B2-1F43B9B3848F}" type="datetimeFigureOut">
               <a:rPr lang="en-US" smtClean="0"/>
-              <a:t>9/29/2026</a:t>
+              <a:t>10/1/2026</a:t>
             </a:fld>
             <a:endParaRPr lang="en-US"/>
           </a:p>
@@ -772,7 +773,7 @@
           <a:p>
             <a:fld id="{95CACCF8-B847-4313-84B2-1F43B9B3848F}" type="datetimeFigureOut">
               <a:rPr lang="en-US" smtClean="0"/>
-              <a:t>9/29/2026</a:t>
+              <a:t>10/1/2026</a:t>
             </a:fld>
             <a:endParaRPr lang="en-US"/>
           </a:p>
@@ -1017,7 +1018,7 @@
           <a:p>
             <a:fld id="{95CACCF8-B847-4313-84B2-1F43B9B3848F}" type="datetimeFigureOut">
               <a:rPr lang="en-US" smtClean="0"/>
-              <a:t>9/29/2026</a:t>
+              <a:t>10/1/2026</a:t>
             </a:fld>
             <a:endParaRPr lang="en-US"/>
           </a:p>
@@ -1246,7 +1247,7 @@
           <a:p>
             <a:fld id="{95CACCF8-B847-4313-84B2-1F43B9B3848F}" type="datetimeFigureOut">
               <a:rPr lang="en-US" smtClean="0"/>
-              <a:t>9/29/2026</a:t>
+              <a:t>10/1/2026</a:t>
             </a:fld>
             <a:endParaRPr lang="en-US"/>
           </a:p>
@@ -1610,7 +1611,7 @@
           <a:p>
             <a:fld id="{95CACCF8-B847-4313-84B2-1F43B9B3848F}" type="datetimeFigureOut">
               <a:rPr lang="en-US" smtClean="0"/>
-              <a:t>9/29/2026</a:t>
+              <a:t>10/1/2026</a:t>
             </a:fld>
             <a:endParaRPr lang="en-US"/>
           </a:p>
@@ -1727,7 +1728,7 @@
           <a:p>
             <a:fld id="{95CACCF8-B847-4313-84B2-1F43B9B3848F}" type="datetimeFigureOut">
               <a:rPr lang="en-US" smtClean="0"/>
-              <a:t>9/29/2026</a:t>
+              <a:t>10/1/2026</a:t>
             </a:fld>
             <a:endParaRPr lang="en-US"/>
           </a:p>
@@ -1822,7 +1823,7 @@
           <a:p>
             <a:fld id="{95CACCF8-B847-4313-84B2-1F43B9B3848F}" type="datetimeFigureOut">
               <a:rPr lang="en-US" smtClean="0"/>
-              <a:t>9/29/2026</a:t>
+              <a:t>10/1/2026</a:t>
             </a:fld>
             <a:endParaRPr lang="en-US"/>
           </a:p>
@@ -2097,7 +2098,7 @@
           <a:p>
             <a:fld id="{95CACCF8-B847-4313-84B2-1F43B9B3848F}" type="datetimeFigureOut">
               <a:rPr lang="en-US" smtClean="0"/>
-              <a:t>9/29/2026</a:t>
+              <a:t>10/1/2026</a:t>
             </a:fld>
             <a:endParaRPr lang="en-US"/>
           </a:p>
@@ -2349,7 +2350,7 @@
           <a:p>
             <a:fld id="{95CACCF8-B847-4313-84B2-1F43B9B3848F}" type="datetimeFigureOut">
               <a:rPr lang="en-US" smtClean="0"/>
-              <a:t>9/29/2026</a:t>
+              <a:t>10/1/2026</a:t>
             </a:fld>
             <a:endParaRPr lang="en-US"/>
           </a:p>
@@ -2566,7 +2567,7 @@
           <a:p>
             <a:fld id="{95CACCF8-B847-4313-84B2-1F43B9B3848F}" type="datetimeFigureOut">
               <a:rPr lang="en-US" smtClean="0"/>
-              <a:t>9/29/2026</a:t>
+              <a:t>10/1/2026</a:t>
             </a:fld>
             <a:endParaRPr lang="en-US"/>
           </a:p>
@@ -3551,8 +3552,8 @@
           </a:p>
         </p:txBody>
       </p:sp>
-      <mc:AlternateContent xmlns:mc="http://schemas.openxmlformats.org/markup-compatibility/2006">
-        <mc:Choice xmlns:a14="http://schemas.microsoft.com/office/drawing/2010/main" Requires="a14">
+      <mc:AlternateContent xmlns:mc="http://schemas.openxmlformats.org/markup-compatibility/2006" xmlns:a14="http://schemas.microsoft.com/office/drawing/2010/main">
+        <mc:Choice Requires="a14">
           <p:sp>
             <p:nvSpPr>
               <p:cNvPr id="11" name="TextBox 10"/>
@@ -3617,7 +3618,7 @@
             </p:txBody>
           </p:sp>
         </mc:Choice>
-        <mc:Fallback>
+        <mc:Fallback xmlns="">
           <p:sp>
             <p:nvSpPr>
               <p:cNvPr id="11" name="TextBox 10"/>
@@ -5064,8 +5065,8 @@
           </a:p>
         </p:txBody>
       </p:sp>
-      <mc:AlternateContent xmlns:mc="http://schemas.openxmlformats.org/markup-compatibility/2006">
-        <mc:Choice xmlns:a14="http://schemas.microsoft.com/office/drawing/2010/main" Requires="a14">
+      <mc:AlternateContent xmlns:mc="http://schemas.openxmlformats.org/markup-compatibility/2006" xmlns:a14="http://schemas.microsoft.com/office/drawing/2010/main">
+        <mc:Choice Requires="a14">
           <p:sp>
             <p:nvSpPr>
               <p:cNvPr id="11" name="TextBox 10"/>
@@ -5130,7 +5131,7 @@
             </p:txBody>
           </p:sp>
         </mc:Choice>
-        <mc:Fallback>
+        <mc:Fallback xmlns="">
           <p:sp>
             <p:nvSpPr>
               <p:cNvPr id="11" name="TextBox 10"/>
@@ -7923,6 +7924,2454 @@
       </p:grpSpPr>
       <p:sp>
         <p:nvSpPr>
+          <p:cNvPr id="2" name="Title 1"/>
+          <p:cNvSpPr>
+            <a:spLocks noGrp="1"/>
+          </p:cNvSpPr>
+          <p:nvPr>
+            <p:ph type="title"/>
+          </p:nvPr>
+        </p:nvSpPr>
+        <p:spPr>
+          <a:xfrm>
+            <a:off x="366822" y="826275"/>
+            <a:ext cx="10515600" cy="1325563"/>
+          </a:xfrm>
+        </p:spPr>
+        <p:txBody>
+          <a:bodyPr/>
+          <a:lstStyle/>
+          <a:p>
+            <a:r>
+              <a:rPr lang="en-US" sz="4000" b="1" dirty="0">
+                <a:latin typeface="Comic Sans MS" panose="030F0702030302020204" pitchFamily="66" charset="0"/>
+              </a:rPr>
+              <a:t>Starter</a:t>
+            </a:r>
+          </a:p>
+        </p:txBody>
+      </p:sp>
+      <p:sp>
+        <p:nvSpPr>
+          <p:cNvPr id="3" name="Content Placeholder 2"/>
+          <p:cNvSpPr>
+            <a:spLocks noGrp="1"/>
+          </p:cNvSpPr>
+          <p:nvPr>
+            <p:ph idx="1"/>
+          </p:nvPr>
+        </p:nvSpPr>
+        <p:spPr>
+          <a:xfrm>
+            <a:off x="226324" y="2097596"/>
+            <a:ext cx="1768522" cy="545911"/>
+          </a:xfrm>
+        </p:spPr>
+        <p:txBody>
+          <a:bodyPr/>
+          <a:lstStyle/>
+          <a:p>
+            <a:pPr marL="0" indent="0">
+              <a:buNone/>
+            </a:pPr>
+            <a:r>
+              <a:rPr lang="en-US" sz="2400" dirty="0">
+                <a:latin typeface="Comic Sans MS" panose="030F0702030302020204" pitchFamily="66" charset="0"/>
+              </a:rPr>
+              <a:t>1)</a:t>
+            </a:r>
+          </a:p>
+        </p:txBody>
+      </p:sp>
+      <p:sp>
+        <p:nvSpPr>
+          <p:cNvPr id="4" name="Subtitle 2"/>
+          <p:cNvSpPr txBox="1">
+            <a:spLocks/>
+          </p:cNvSpPr>
+          <p:nvPr/>
+        </p:nvSpPr>
+        <p:spPr>
+          <a:xfrm>
+            <a:off x="77337" y="185284"/>
+            <a:ext cx="12037325" cy="838298"/>
+          </a:xfrm>
+          <a:prstGeom prst="rect">
+            <a:avLst/>
+          </a:prstGeom>
+        </p:spPr>
+        <p:txBody>
+          <a:bodyPr vert="horz" lIns="91440" tIns="45720" rIns="91440" bIns="45720" rtlCol="0">
+            <a:normAutofit/>
+          </a:bodyPr>
+          <a:lstStyle>
+            <a:lvl1pPr marL="228600" indent="-228600" algn="l" defTabSz="914400" rtl="0" eaLnBrk="1" latinLnBrk="0" hangingPunct="1">
+              <a:lnSpc>
+                <a:spcPct val="90000"/>
+              </a:lnSpc>
+              <a:spcBef>
+                <a:spcPts val="1000"/>
+              </a:spcBef>
+              <a:buFont typeface="Arial" panose="020B0604020202020204" pitchFamily="34" charset="0"/>
+              <a:buChar char="•"/>
+              <a:defRPr sz="2800" kern="1200">
+                <a:solidFill>
+                  <a:schemeClr val="tx1"/>
+                </a:solidFill>
+                <a:latin typeface="+mn-lt"/>
+                <a:ea typeface="+mn-ea"/>
+                <a:cs typeface="+mn-cs"/>
+              </a:defRPr>
+            </a:lvl1pPr>
+            <a:lvl2pPr marL="685800" indent="-228600" algn="l" defTabSz="914400" rtl="0" eaLnBrk="1" latinLnBrk="0" hangingPunct="1">
+              <a:lnSpc>
+                <a:spcPct val="90000"/>
+              </a:lnSpc>
+              <a:spcBef>
+                <a:spcPts val="500"/>
+              </a:spcBef>
+              <a:buFont typeface="Arial" panose="020B0604020202020204" pitchFamily="34" charset="0"/>
+              <a:buChar char="•"/>
+              <a:defRPr sz="2400" kern="1200">
+                <a:solidFill>
+                  <a:schemeClr val="tx1"/>
+                </a:solidFill>
+                <a:latin typeface="+mn-lt"/>
+                <a:ea typeface="+mn-ea"/>
+                <a:cs typeface="+mn-cs"/>
+              </a:defRPr>
+            </a:lvl2pPr>
+            <a:lvl3pPr marL="1143000" indent="-228600" algn="l" defTabSz="914400" rtl="0" eaLnBrk="1" latinLnBrk="0" hangingPunct="1">
+              <a:lnSpc>
+                <a:spcPct val="90000"/>
+              </a:lnSpc>
+              <a:spcBef>
+                <a:spcPts val="500"/>
+              </a:spcBef>
+              <a:buFont typeface="Arial" panose="020B0604020202020204" pitchFamily="34" charset="0"/>
+              <a:buChar char="•"/>
+              <a:defRPr sz="2000" kern="1200">
+                <a:solidFill>
+                  <a:schemeClr val="tx1"/>
+                </a:solidFill>
+                <a:latin typeface="+mn-lt"/>
+                <a:ea typeface="+mn-ea"/>
+                <a:cs typeface="+mn-cs"/>
+              </a:defRPr>
+            </a:lvl3pPr>
+            <a:lvl4pPr marL="1600200" indent="-228600" algn="l" defTabSz="914400" rtl="0" eaLnBrk="1" latinLnBrk="0" hangingPunct="1">
+              <a:lnSpc>
+                <a:spcPct val="90000"/>
+              </a:lnSpc>
+              <a:spcBef>
+                <a:spcPts val="500"/>
+              </a:spcBef>
+              <a:buFont typeface="Arial" panose="020B0604020202020204" pitchFamily="34" charset="0"/>
+              <a:buChar char="•"/>
+              <a:defRPr sz="1800" kern="1200">
+                <a:solidFill>
+                  <a:schemeClr val="tx1"/>
+                </a:solidFill>
+                <a:latin typeface="+mn-lt"/>
+                <a:ea typeface="+mn-ea"/>
+                <a:cs typeface="+mn-cs"/>
+              </a:defRPr>
+            </a:lvl4pPr>
+            <a:lvl5pPr marL="2057400" indent="-228600" algn="l" defTabSz="914400" rtl="0" eaLnBrk="1" latinLnBrk="0" hangingPunct="1">
+              <a:lnSpc>
+                <a:spcPct val="90000"/>
+              </a:lnSpc>
+              <a:spcBef>
+                <a:spcPts val="500"/>
+              </a:spcBef>
+              <a:buFont typeface="Arial" panose="020B0604020202020204" pitchFamily="34" charset="0"/>
+              <a:buChar char="•"/>
+              <a:defRPr sz="1800" kern="1200">
+                <a:solidFill>
+                  <a:schemeClr val="tx1"/>
+                </a:solidFill>
+                <a:latin typeface="+mn-lt"/>
+                <a:ea typeface="+mn-ea"/>
+                <a:cs typeface="+mn-cs"/>
+              </a:defRPr>
+            </a:lvl5pPr>
+            <a:lvl6pPr marL="2514600" indent="-228600" algn="l" defTabSz="914400" rtl="0" eaLnBrk="1" latinLnBrk="0" hangingPunct="1">
+              <a:lnSpc>
+                <a:spcPct val="90000"/>
+              </a:lnSpc>
+              <a:spcBef>
+                <a:spcPts val="500"/>
+              </a:spcBef>
+              <a:buFont typeface="Arial" panose="020B0604020202020204" pitchFamily="34" charset="0"/>
+              <a:buChar char="•"/>
+              <a:defRPr sz="1800" kern="1200">
+                <a:solidFill>
+                  <a:schemeClr val="tx1"/>
+                </a:solidFill>
+                <a:latin typeface="+mn-lt"/>
+                <a:ea typeface="+mn-ea"/>
+                <a:cs typeface="+mn-cs"/>
+              </a:defRPr>
+            </a:lvl6pPr>
+            <a:lvl7pPr marL="2971800" indent="-228600" algn="l" defTabSz="914400" rtl="0" eaLnBrk="1" latinLnBrk="0" hangingPunct="1">
+              <a:lnSpc>
+                <a:spcPct val="90000"/>
+              </a:lnSpc>
+              <a:spcBef>
+                <a:spcPts val="500"/>
+              </a:spcBef>
+              <a:buFont typeface="Arial" panose="020B0604020202020204" pitchFamily="34" charset="0"/>
+              <a:buChar char="•"/>
+              <a:defRPr sz="1800" kern="1200">
+                <a:solidFill>
+                  <a:schemeClr val="tx1"/>
+                </a:solidFill>
+                <a:latin typeface="+mn-lt"/>
+                <a:ea typeface="+mn-ea"/>
+                <a:cs typeface="+mn-cs"/>
+              </a:defRPr>
+            </a:lvl7pPr>
+            <a:lvl8pPr marL="3429000" indent="-228600" algn="l" defTabSz="914400" rtl="0" eaLnBrk="1" latinLnBrk="0" hangingPunct="1">
+              <a:lnSpc>
+                <a:spcPct val="90000"/>
+              </a:lnSpc>
+              <a:spcBef>
+                <a:spcPts val="500"/>
+              </a:spcBef>
+              <a:buFont typeface="Arial" panose="020B0604020202020204" pitchFamily="34" charset="0"/>
+              <a:buChar char="•"/>
+              <a:defRPr sz="1800" kern="1200">
+                <a:solidFill>
+                  <a:schemeClr val="tx1"/>
+                </a:solidFill>
+                <a:latin typeface="+mn-lt"/>
+                <a:ea typeface="+mn-ea"/>
+                <a:cs typeface="+mn-cs"/>
+              </a:defRPr>
+            </a:lvl8pPr>
+            <a:lvl9pPr marL="3886200" indent="-228600" algn="l" defTabSz="914400" rtl="0" eaLnBrk="1" latinLnBrk="0" hangingPunct="1">
+              <a:lnSpc>
+                <a:spcPct val="90000"/>
+              </a:lnSpc>
+              <a:spcBef>
+                <a:spcPts val="500"/>
+              </a:spcBef>
+              <a:buFont typeface="Arial" panose="020B0604020202020204" pitchFamily="34" charset="0"/>
+              <a:buChar char="•"/>
+              <a:defRPr sz="1800" kern="1200">
+                <a:solidFill>
+                  <a:schemeClr val="tx1"/>
+                </a:solidFill>
+                <a:latin typeface="+mn-lt"/>
+                <a:ea typeface="+mn-ea"/>
+                <a:cs typeface="+mn-cs"/>
+              </a:defRPr>
+            </a:lvl9pPr>
+          </a:lstStyle>
+          <a:p>
+            <a:pPr marL="0" indent="0">
+              <a:buNone/>
+            </a:pPr>
+            <a:r>
+              <a:rPr lang="en-US" sz="2400" b="1" dirty="0">
+                <a:latin typeface="Comic Sans MS" panose="030F0702030302020204" pitchFamily="66" charset="0"/>
+              </a:rPr>
+              <a:t>WALT: </a:t>
+            </a:r>
+            <a:r>
+              <a:rPr lang="en-US" sz="2400" dirty="0">
+                <a:latin typeface="Comic Sans MS" panose="030F0702030302020204" pitchFamily="66" charset="0"/>
+              </a:rPr>
+              <a:t>Recognise that fractions, decimals and percentages can have equivalent values.</a:t>
+            </a:r>
+            <a:endParaRPr lang="en-US" sz="2400" b="1" dirty="0">
+              <a:latin typeface="Comic Sans MS" panose="030F0702030302020204" pitchFamily="66" charset="0"/>
+            </a:endParaRPr>
+          </a:p>
+          <a:p>
+            <a:pPr marL="0" indent="0">
+              <a:buNone/>
+            </a:pPr>
+            <a:endParaRPr lang="en-US" sz="2400" dirty="0">
+              <a:latin typeface="Comic Sans MS" panose="030F0702030302020204" pitchFamily="66" charset="0"/>
+            </a:endParaRPr>
+          </a:p>
+        </p:txBody>
+      </p:sp>
+      <p:sp>
+        <p:nvSpPr>
+          <p:cNvPr id="6" name="TextBox 5"/>
+          <p:cNvSpPr txBox="1"/>
+          <p:nvPr/>
+        </p:nvSpPr>
+        <p:spPr>
+          <a:xfrm>
+            <a:off x="2984090" y="1965185"/>
+            <a:ext cx="3859472" cy="923330"/>
+          </a:xfrm>
+          <a:prstGeom prst="rect">
+            <a:avLst/>
+          </a:prstGeom>
+          <a:noFill/>
+        </p:spPr>
+        <p:txBody>
+          <a:bodyPr wrap="square" rtlCol="0">
+            <a:spAutoFit/>
+          </a:bodyPr>
+          <a:lstStyle/>
+          <a:p>
+            <a:r>
+              <a:rPr lang="en-US" dirty="0">
+                <a:latin typeface="Comic Sans MS" panose="030F0702030302020204" pitchFamily="66" charset="0"/>
+              </a:rPr>
+              <a:t>What fraction, percentage and decimal of this pentagon has been shaded?</a:t>
+            </a:r>
+          </a:p>
+        </p:txBody>
+      </p:sp>
+      <p:sp>
+        <p:nvSpPr>
+          <p:cNvPr id="7" name="Content Placeholder 2"/>
+          <p:cNvSpPr txBox="1">
+            <a:spLocks/>
+          </p:cNvSpPr>
+          <p:nvPr/>
+        </p:nvSpPr>
+        <p:spPr>
+          <a:xfrm>
+            <a:off x="7077431" y="2182575"/>
+            <a:ext cx="1768522" cy="545911"/>
+          </a:xfrm>
+          <a:prstGeom prst="rect">
+            <a:avLst/>
+          </a:prstGeom>
+        </p:spPr>
+        <p:txBody>
+          <a:bodyPr vert="horz" lIns="91440" tIns="45720" rIns="91440" bIns="45720" rtlCol="0">
+            <a:normAutofit/>
+          </a:bodyPr>
+          <a:lstStyle>
+            <a:lvl1pPr marL="228600" indent="-228600" algn="l" defTabSz="914400" rtl="0" eaLnBrk="1" latinLnBrk="0" hangingPunct="1">
+              <a:lnSpc>
+                <a:spcPct val="90000"/>
+              </a:lnSpc>
+              <a:spcBef>
+                <a:spcPts val="1000"/>
+              </a:spcBef>
+              <a:buFont typeface="Arial" panose="020B0604020202020204" pitchFamily="34" charset="0"/>
+              <a:buChar char="•"/>
+              <a:defRPr sz="2800" kern="1200">
+                <a:solidFill>
+                  <a:schemeClr val="tx1"/>
+                </a:solidFill>
+                <a:latin typeface="+mn-lt"/>
+                <a:ea typeface="+mn-ea"/>
+                <a:cs typeface="+mn-cs"/>
+              </a:defRPr>
+            </a:lvl1pPr>
+            <a:lvl2pPr marL="685800" indent="-228600" algn="l" defTabSz="914400" rtl="0" eaLnBrk="1" latinLnBrk="0" hangingPunct="1">
+              <a:lnSpc>
+                <a:spcPct val="90000"/>
+              </a:lnSpc>
+              <a:spcBef>
+                <a:spcPts val="500"/>
+              </a:spcBef>
+              <a:buFont typeface="Arial" panose="020B0604020202020204" pitchFamily="34" charset="0"/>
+              <a:buChar char="•"/>
+              <a:defRPr sz="2400" kern="1200">
+                <a:solidFill>
+                  <a:schemeClr val="tx1"/>
+                </a:solidFill>
+                <a:latin typeface="+mn-lt"/>
+                <a:ea typeface="+mn-ea"/>
+                <a:cs typeface="+mn-cs"/>
+              </a:defRPr>
+            </a:lvl2pPr>
+            <a:lvl3pPr marL="1143000" indent="-228600" algn="l" defTabSz="914400" rtl="0" eaLnBrk="1" latinLnBrk="0" hangingPunct="1">
+              <a:lnSpc>
+                <a:spcPct val="90000"/>
+              </a:lnSpc>
+              <a:spcBef>
+                <a:spcPts val="500"/>
+              </a:spcBef>
+              <a:buFont typeface="Arial" panose="020B0604020202020204" pitchFamily="34" charset="0"/>
+              <a:buChar char="•"/>
+              <a:defRPr sz="2000" kern="1200">
+                <a:solidFill>
+                  <a:schemeClr val="tx1"/>
+                </a:solidFill>
+                <a:latin typeface="+mn-lt"/>
+                <a:ea typeface="+mn-ea"/>
+                <a:cs typeface="+mn-cs"/>
+              </a:defRPr>
+            </a:lvl3pPr>
+            <a:lvl4pPr marL="1600200" indent="-228600" algn="l" defTabSz="914400" rtl="0" eaLnBrk="1" latinLnBrk="0" hangingPunct="1">
+              <a:lnSpc>
+                <a:spcPct val="90000"/>
+              </a:lnSpc>
+              <a:spcBef>
+                <a:spcPts val="500"/>
+              </a:spcBef>
+              <a:buFont typeface="Arial" panose="020B0604020202020204" pitchFamily="34" charset="0"/>
+              <a:buChar char="•"/>
+              <a:defRPr sz="1800" kern="1200">
+                <a:solidFill>
+                  <a:schemeClr val="tx1"/>
+                </a:solidFill>
+                <a:latin typeface="+mn-lt"/>
+                <a:ea typeface="+mn-ea"/>
+                <a:cs typeface="+mn-cs"/>
+              </a:defRPr>
+            </a:lvl4pPr>
+            <a:lvl5pPr marL="2057400" indent="-228600" algn="l" defTabSz="914400" rtl="0" eaLnBrk="1" latinLnBrk="0" hangingPunct="1">
+              <a:lnSpc>
+                <a:spcPct val="90000"/>
+              </a:lnSpc>
+              <a:spcBef>
+                <a:spcPts val="500"/>
+              </a:spcBef>
+              <a:buFont typeface="Arial" panose="020B0604020202020204" pitchFamily="34" charset="0"/>
+              <a:buChar char="•"/>
+              <a:defRPr sz="1800" kern="1200">
+                <a:solidFill>
+                  <a:schemeClr val="tx1"/>
+                </a:solidFill>
+                <a:latin typeface="+mn-lt"/>
+                <a:ea typeface="+mn-ea"/>
+                <a:cs typeface="+mn-cs"/>
+              </a:defRPr>
+            </a:lvl5pPr>
+            <a:lvl6pPr marL="2514600" indent="-228600" algn="l" defTabSz="914400" rtl="0" eaLnBrk="1" latinLnBrk="0" hangingPunct="1">
+              <a:lnSpc>
+                <a:spcPct val="90000"/>
+              </a:lnSpc>
+              <a:spcBef>
+                <a:spcPts val="500"/>
+              </a:spcBef>
+              <a:buFont typeface="Arial" panose="020B0604020202020204" pitchFamily="34" charset="0"/>
+              <a:buChar char="•"/>
+              <a:defRPr sz="1800" kern="1200">
+                <a:solidFill>
+                  <a:schemeClr val="tx1"/>
+                </a:solidFill>
+                <a:latin typeface="+mn-lt"/>
+                <a:ea typeface="+mn-ea"/>
+                <a:cs typeface="+mn-cs"/>
+              </a:defRPr>
+            </a:lvl6pPr>
+            <a:lvl7pPr marL="2971800" indent="-228600" algn="l" defTabSz="914400" rtl="0" eaLnBrk="1" latinLnBrk="0" hangingPunct="1">
+              <a:lnSpc>
+                <a:spcPct val="90000"/>
+              </a:lnSpc>
+              <a:spcBef>
+                <a:spcPts val="500"/>
+              </a:spcBef>
+              <a:buFont typeface="Arial" panose="020B0604020202020204" pitchFamily="34" charset="0"/>
+              <a:buChar char="•"/>
+              <a:defRPr sz="1800" kern="1200">
+                <a:solidFill>
+                  <a:schemeClr val="tx1"/>
+                </a:solidFill>
+                <a:latin typeface="+mn-lt"/>
+                <a:ea typeface="+mn-ea"/>
+                <a:cs typeface="+mn-cs"/>
+              </a:defRPr>
+            </a:lvl7pPr>
+            <a:lvl8pPr marL="3429000" indent="-228600" algn="l" defTabSz="914400" rtl="0" eaLnBrk="1" latinLnBrk="0" hangingPunct="1">
+              <a:lnSpc>
+                <a:spcPct val="90000"/>
+              </a:lnSpc>
+              <a:spcBef>
+                <a:spcPts val="500"/>
+              </a:spcBef>
+              <a:buFont typeface="Arial" panose="020B0604020202020204" pitchFamily="34" charset="0"/>
+              <a:buChar char="•"/>
+              <a:defRPr sz="1800" kern="1200">
+                <a:solidFill>
+                  <a:schemeClr val="tx1"/>
+                </a:solidFill>
+                <a:latin typeface="+mn-lt"/>
+                <a:ea typeface="+mn-ea"/>
+                <a:cs typeface="+mn-cs"/>
+              </a:defRPr>
+            </a:lvl8pPr>
+            <a:lvl9pPr marL="3886200" indent="-228600" algn="l" defTabSz="914400" rtl="0" eaLnBrk="1" latinLnBrk="0" hangingPunct="1">
+              <a:lnSpc>
+                <a:spcPct val="90000"/>
+              </a:lnSpc>
+              <a:spcBef>
+                <a:spcPts val="500"/>
+              </a:spcBef>
+              <a:buFont typeface="Arial" panose="020B0604020202020204" pitchFamily="34" charset="0"/>
+              <a:buChar char="•"/>
+              <a:defRPr sz="1800" kern="1200">
+                <a:solidFill>
+                  <a:schemeClr val="tx1"/>
+                </a:solidFill>
+                <a:latin typeface="+mn-lt"/>
+                <a:ea typeface="+mn-ea"/>
+                <a:cs typeface="+mn-cs"/>
+              </a:defRPr>
+            </a:lvl9pPr>
+          </a:lstStyle>
+          <a:p>
+            <a:pPr marL="0" indent="0">
+              <a:buFont typeface="Arial" panose="020B0604020202020204" pitchFamily="34" charset="0"/>
+              <a:buNone/>
+            </a:pPr>
+            <a:r>
+              <a:rPr lang="en-US" sz="2400" dirty="0">
+                <a:latin typeface="Comic Sans MS" panose="030F0702030302020204" pitchFamily="66" charset="0"/>
+              </a:rPr>
+              <a:t>2)</a:t>
+            </a:r>
+          </a:p>
+        </p:txBody>
+      </p:sp>
+      <p:sp>
+        <p:nvSpPr>
+          <p:cNvPr id="8" name="TextBox 7"/>
+          <p:cNvSpPr txBox="1"/>
+          <p:nvPr/>
+        </p:nvSpPr>
+        <p:spPr>
+          <a:xfrm>
+            <a:off x="7577235" y="1654635"/>
+            <a:ext cx="4160825" cy="646331"/>
+          </a:xfrm>
+          <a:prstGeom prst="rect">
+            <a:avLst/>
+          </a:prstGeom>
+          <a:noFill/>
+        </p:spPr>
+        <p:txBody>
+          <a:bodyPr wrap="square" rtlCol="0">
+            <a:spAutoFit/>
+          </a:bodyPr>
+          <a:lstStyle/>
+          <a:p>
+            <a:r>
+              <a:rPr lang="en-US" dirty="0">
+                <a:latin typeface="Comic Sans MS" panose="030F0702030302020204" pitchFamily="66" charset="0"/>
+              </a:rPr>
+              <a:t>Copy and complete this table. Write the fraction in it’s simplest form.</a:t>
+            </a:r>
+          </a:p>
+        </p:txBody>
+      </p:sp>
+      <p:graphicFrame>
+        <p:nvGraphicFramePr>
+          <p:cNvPr id="9" name="Table 8"/>
+          <p:cNvGraphicFramePr>
+            <a:graphicFrameLocks noGrp="1"/>
+          </p:cNvGraphicFramePr>
+          <p:nvPr>
+            <p:extLst>
+              <p:ext uri="{D42A27DB-BD31-4B8C-83A1-F6EECF244321}">
+                <p14:modId xmlns:p14="http://schemas.microsoft.com/office/powerpoint/2010/main" val="769182394"/>
+              </p:ext>
+            </p:extLst>
+          </p:nvPr>
+        </p:nvGraphicFramePr>
+        <p:xfrm>
+          <a:off x="7313227" y="2728486"/>
+          <a:ext cx="4681182" cy="1835505"/>
+        </p:xfrm>
+        <a:graphic>
+          <a:graphicData uri="http://schemas.openxmlformats.org/drawingml/2006/table">
+            <a:tbl>
+              <a:tblPr firstRow="1" bandRow="1">
+                <a:tableStyleId>{5C22544A-7EE6-4342-B048-85BDC9FD1C3A}</a:tableStyleId>
+              </a:tblPr>
+              <a:tblGrid>
+                <a:gridCol w="1560394">
+                  <a:extLst>
+                    <a:ext uri="{9D8B030D-6E8A-4147-A177-3AD203B41FA5}">
+                      <a16:colId xmlns:a16="http://schemas.microsoft.com/office/drawing/2014/main" val="971965474"/>
+                    </a:ext>
+                  </a:extLst>
+                </a:gridCol>
+                <a:gridCol w="1560394">
+                  <a:extLst>
+                    <a:ext uri="{9D8B030D-6E8A-4147-A177-3AD203B41FA5}">
+                      <a16:colId xmlns:a16="http://schemas.microsoft.com/office/drawing/2014/main" val="104176607"/>
+                    </a:ext>
+                  </a:extLst>
+                </a:gridCol>
+                <a:gridCol w="1560394">
+                  <a:extLst>
+                    <a:ext uri="{9D8B030D-6E8A-4147-A177-3AD203B41FA5}">
+                      <a16:colId xmlns:a16="http://schemas.microsoft.com/office/drawing/2014/main" val="1370650676"/>
+                    </a:ext>
+                  </a:extLst>
+                </a:gridCol>
+              </a:tblGrid>
+              <a:tr h="581062">
+                <a:tc>
+                  <a:txBody>
+                    <a:bodyPr/>
+                    <a:lstStyle/>
+                    <a:p>
+                      <a:pPr algn="ctr"/>
+                      <a:r>
+                        <a:rPr lang="en-US" sz="2000" dirty="0">
+                          <a:latin typeface="Twinkl" panose="02000000000000000000" pitchFamily="2" charset="0"/>
+                        </a:rPr>
+                        <a:t>Fraction</a:t>
+                      </a:r>
+                    </a:p>
+                  </a:txBody>
+                  <a:tcPr/>
+                </a:tc>
+                <a:tc>
+                  <a:txBody>
+                    <a:bodyPr/>
+                    <a:lstStyle/>
+                    <a:p>
+                      <a:pPr algn="ctr"/>
+                      <a:r>
+                        <a:rPr lang="en-US" sz="2000" dirty="0">
+                          <a:latin typeface="Twinkl" panose="02000000000000000000" pitchFamily="2" charset="0"/>
+                        </a:rPr>
+                        <a:t>Percentage</a:t>
+                      </a:r>
+                    </a:p>
+                  </a:txBody>
+                  <a:tcPr/>
+                </a:tc>
+                <a:tc>
+                  <a:txBody>
+                    <a:bodyPr/>
+                    <a:lstStyle/>
+                    <a:p>
+                      <a:pPr algn="ctr"/>
+                      <a:r>
+                        <a:rPr lang="en-US" sz="2000" dirty="0">
+                          <a:latin typeface="Twinkl" panose="02000000000000000000" pitchFamily="2" charset="0"/>
+                        </a:rPr>
+                        <a:t>Decimal</a:t>
+                      </a:r>
+                    </a:p>
+                  </a:txBody>
+                  <a:tcPr/>
+                </a:tc>
+                <a:extLst>
+                  <a:ext uri="{0D108BD9-81ED-4DB2-BD59-A6C34878D82A}">
+                    <a16:rowId xmlns:a16="http://schemas.microsoft.com/office/drawing/2014/main" val="332356926"/>
+                  </a:ext>
+                </a:extLst>
+              </a:tr>
+              <a:tr h="543815">
+                <a:tc>
+                  <a:txBody>
+                    <a:bodyPr/>
+                    <a:lstStyle/>
+                    <a:p>
+                      <a:pPr algn="ctr"/>
+                      <a:r>
+                        <a:rPr lang="en-US" dirty="0"/>
+                        <a:t> </a:t>
+                      </a:r>
+                    </a:p>
+                  </a:txBody>
+                  <a:tcPr/>
+                </a:tc>
+                <a:tc>
+                  <a:txBody>
+                    <a:bodyPr/>
+                    <a:lstStyle/>
+                    <a:p>
+                      <a:endParaRPr lang="en-US"/>
+                    </a:p>
+                  </a:txBody>
+                  <a:tcPr/>
+                </a:tc>
+                <a:tc>
+                  <a:txBody>
+                    <a:bodyPr/>
+                    <a:lstStyle/>
+                    <a:p>
+                      <a:endParaRPr lang="en-US"/>
+                    </a:p>
+                  </a:txBody>
+                  <a:tcPr/>
+                </a:tc>
+                <a:extLst>
+                  <a:ext uri="{0D108BD9-81ED-4DB2-BD59-A6C34878D82A}">
+                    <a16:rowId xmlns:a16="http://schemas.microsoft.com/office/drawing/2014/main" val="1685036781"/>
+                  </a:ext>
+                </a:extLst>
+              </a:tr>
+              <a:tr h="710628">
+                <a:tc>
+                  <a:txBody>
+                    <a:bodyPr/>
+                    <a:lstStyle/>
+                    <a:p>
+                      <a:endParaRPr lang="en-US" dirty="0"/>
+                    </a:p>
+                  </a:txBody>
+                  <a:tcPr/>
+                </a:tc>
+                <a:tc>
+                  <a:txBody>
+                    <a:bodyPr/>
+                    <a:lstStyle/>
+                    <a:p>
+                      <a:endParaRPr lang="en-US" dirty="0"/>
+                    </a:p>
+                  </a:txBody>
+                  <a:tcPr/>
+                </a:tc>
+                <a:tc>
+                  <a:txBody>
+                    <a:bodyPr/>
+                    <a:lstStyle/>
+                    <a:p>
+                      <a:pPr algn="ctr"/>
+                      <a:r>
+                        <a:rPr lang="en-US" sz="2800" b="1" dirty="0">
+                          <a:latin typeface="Twinkl" panose="02000000000000000000" pitchFamily="2" charset="0"/>
+                        </a:rPr>
+                        <a:t>1.8</a:t>
+                      </a:r>
+                    </a:p>
+                  </a:txBody>
+                  <a:tcPr/>
+                </a:tc>
+                <a:extLst>
+                  <a:ext uri="{0D108BD9-81ED-4DB2-BD59-A6C34878D82A}">
+                    <a16:rowId xmlns:a16="http://schemas.microsoft.com/office/drawing/2014/main" val="1297841946"/>
+                  </a:ext>
+                </a:extLst>
+              </a:tr>
+            </a:tbl>
+          </a:graphicData>
+        </a:graphic>
+      </p:graphicFrame>
+      <p:sp>
+        <p:nvSpPr>
+          <p:cNvPr id="10" name="Content Placeholder 2"/>
+          <p:cNvSpPr txBox="1">
+            <a:spLocks/>
+          </p:cNvSpPr>
+          <p:nvPr/>
+        </p:nvSpPr>
+        <p:spPr>
+          <a:xfrm>
+            <a:off x="226324" y="5402308"/>
+            <a:ext cx="2817127" cy="1039435"/>
+          </a:xfrm>
+          <a:prstGeom prst="rect">
+            <a:avLst/>
+          </a:prstGeom>
+        </p:spPr>
+        <p:txBody>
+          <a:bodyPr vert="horz" lIns="91440" tIns="45720" rIns="91440" bIns="45720" rtlCol="0">
+            <a:normAutofit/>
+          </a:bodyPr>
+          <a:lstStyle>
+            <a:lvl1pPr marL="228600" indent="-228600" algn="l" defTabSz="914400" rtl="0" eaLnBrk="1" latinLnBrk="0" hangingPunct="1">
+              <a:lnSpc>
+                <a:spcPct val="90000"/>
+              </a:lnSpc>
+              <a:spcBef>
+                <a:spcPts val="1000"/>
+              </a:spcBef>
+              <a:buFont typeface="Arial" panose="020B0604020202020204" pitchFamily="34" charset="0"/>
+              <a:buChar char="•"/>
+              <a:defRPr sz="2800" kern="1200">
+                <a:solidFill>
+                  <a:schemeClr val="tx1"/>
+                </a:solidFill>
+                <a:latin typeface="+mn-lt"/>
+                <a:ea typeface="+mn-ea"/>
+                <a:cs typeface="+mn-cs"/>
+              </a:defRPr>
+            </a:lvl1pPr>
+            <a:lvl2pPr marL="685800" indent="-228600" algn="l" defTabSz="914400" rtl="0" eaLnBrk="1" latinLnBrk="0" hangingPunct="1">
+              <a:lnSpc>
+                <a:spcPct val="90000"/>
+              </a:lnSpc>
+              <a:spcBef>
+                <a:spcPts val="500"/>
+              </a:spcBef>
+              <a:buFont typeface="Arial" panose="020B0604020202020204" pitchFamily="34" charset="0"/>
+              <a:buChar char="•"/>
+              <a:defRPr sz="2400" kern="1200">
+                <a:solidFill>
+                  <a:schemeClr val="tx1"/>
+                </a:solidFill>
+                <a:latin typeface="+mn-lt"/>
+                <a:ea typeface="+mn-ea"/>
+                <a:cs typeface="+mn-cs"/>
+              </a:defRPr>
+            </a:lvl2pPr>
+            <a:lvl3pPr marL="1143000" indent="-228600" algn="l" defTabSz="914400" rtl="0" eaLnBrk="1" latinLnBrk="0" hangingPunct="1">
+              <a:lnSpc>
+                <a:spcPct val="90000"/>
+              </a:lnSpc>
+              <a:spcBef>
+                <a:spcPts val="500"/>
+              </a:spcBef>
+              <a:buFont typeface="Arial" panose="020B0604020202020204" pitchFamily="34" charset="0"/>
+              <a:buChar char="•"/>
+              <a:defRPr sz="2000" kern="1200">
+                <a:solidFill>
+                  <a:schemeClr val="tx1"/>
+                </a:solidFill>
+                <a:latin typeface="+mn-lt"/>
+                <a:ea typeface="+mn-ea"/>
+                <a:cs typeface="+mn-cs"/>
+              </a:defRPr>
+            </a:lvl3pPr>
+            <a:lvl4pPr marL="1600200" indent="-228600" algn="l" defTabSz="914400" rtl="0" eaLnBrk="1" latinLnBrk="0" hangingPunct="1">
+              <a:lnSpc>
+                <a:spcPct val="90000"/>
+              </a:lnSpc>
+              <a:spcBef>
+                <a:spcPts val="500"/>
+              </a:spcBef>
+              <a:buFont typeface="Arial" panose="020B0604020202020204" pitchFamily="34" charset="0"/>
+              <a:buChar char="•"/>
+              <a:defRPr sz="1800" kern="1200">
+                <a:solidFill>
+                  <a:schemeClr val="tx1"/>
+                </a:solidFill>
+                <a:latin typeface="+mn-lt"/>
+                <a:ea typeface="+mn-ea"/>
+                <a:cs typeface="+mn-cs"/>
+              </a:defRPr>
+            </a:lvl4pPr>
+            <a:lvl5pPr marL="2057400" indent="-228600" algn="l" defTabSz="914400" rtl="0" eaLnBrk="1" latinLnBrk="0" hangingPunct="1">
+              <a:lnSpc>
+                <a:spcPct val="90000"/>
+              </a:lnSpc>
+              <a:spcBef>
+                <a:spcPts val="500"/>
+              </a:spcBef>
+              <a:buFont typeface="Arial" panose="020B0604020202020204" pitchFamily="34" charset="0"/>
+              <a:buChar char="•"/>
+              <a:defRPr sz="1800" kern="1200">
+                <a:solidFill>
+                  <a:schemeClr val="tx1"/>
+                </a:solidFill>
+                <a:latin typeface="+mn-lt"/>
+                <a:ea typeface="+mn-ea"/>
+                <a:cs typeface="+mn-cs"/>
+              </a:defRPr>
+            </a:lvl5pPr>
+            <a:lvl6pPr marL="2514600" indent="-228600" algn="l" defTabSz="914400" rtl="0" eaLnBrk="1" latinLnBrk="0" hangingPunct="1">
+              <a:lnSpc>
+                <a:spcPct val="90000"/>
+              </a:lnSpc>
+              <a:spcBef>
+                <a:spcPts val="500"/>
+              </a:spcBef>
+              <a:buFont typeface="Arial" panose="020B0604020202020204" pitchFamily="34" charset="0"/>
+              <a:buChar char="•"/>
+              <a:defRPr sz="1800" kern="1200">
+                <a:solidFill>
+                  <a:schemeClr val="tx1"/>
+                </a:solidFill>
+                <a:latin typeface="+mn-lt"/>
+                <a:ea typeface="+mn-ea"/>
+                <a:cs typeface="+mn-cs"/>
+              </a:defRPr>
+            </a:lvl6pPr>
+            <a:lvl7pPr marL="2971800" indent="-228600" algn="l" defTabSz="914400" rtl="0" eaLnBrk="1" latinLnBrk="0" hangingPunct="1">
+              <a:lnSpc>
+                <a:spcPct val="90000"/>
+              </a:lnSpc>
+              <a:spcBef>
+                <a:spcPts val="500"/>
+              </a:spcBef>
+              <a:buFont typeface="Arial" panose="020B0604020202020204" pitchFamily="34" charset="0"/>
+              <a:buChar char="•"/>
+              <a:defRPr sz="1800" kern="1200">
+                <a:solidFill>
+                  <a:schemeClr val="tx1"/>
+                </a:solidFill>
+                <a:latin typeface="+mn-lt"/>
+                <a:ea typeface="+mn-ea"/>
+                <a:cs typeface="+mn-cs"/>
+              </a:defRPr>
+            </a:lvl7pPr>
+            <a:lvl8pPr marL="3429000" indent="-228600" algn="l" defTabSz="914400" rtl="0" eaLnBrk="1" latinLnBrk="0" hangingPunct="1">
+              <a:lnSpc>
+                <a:spcPct val="90000"/>
+              </a:lnSpc>
+              <a:spcBef>
+                <a:spcPts val="500"/>
+              </a:spcBef>
+              <a:buFont typeface="Arial" panose="020B0604020202020204" pitchFamily="34" charset="0"/>
+              <a:buChar char="•"/>
+              <a:defRPr sz="1800" kern="1200">
+                <a:solidFill>
+                  <a:schemeClr val="tx1"/>
+                </a:solidFill>
+                <a:latin typeface="+mn-lt"/>
+                <a:ea typeface="+mn-ea"/>
+                <a:cs typeface="+mn-cs"/>
+              </a:defRPr>
+            </a:lvl8pPr>
+            <a:lvl9pPr marL="3886200" indent="-228600" algn="l" defTabSz="914400" rtl="0" eaLnBrk="1" latinLnBrk="0" hangingPunct="1">
+              <a:lnSpc>
+                <a:spcPct val="90000"/>
+              </a:lnSpc>
+              <a:spcBef>
+                <a:spcPts val="500"/>
+              </a:spcBef>
+              <a:buFont typeface="Arial" panose="020B0604020202020204" pitchFamily="34" charset="0"/>
+              <a:buChar char="•"/>
+              <a:defRPr sz="1800" kern="1200">
+                <a:solidFill>
+                  <a:schemeClr val="tx1"/>
+                </a:solidFill>
+                <a:latin typeface="+mn-lt"/>
+                <a:ea typeface="+mn-ea"/>
+                <a:cs typeface="+mn-cs"/>
+              </a:defRPr>
+            </a:lvl9pPr>
+          </a:lstStyle>
+          <a:p>
+            <a:pPr marL="0" indent="0">
+              <a:buFont typeface="Arial" panose="020B0604020202020204" pitchFamily="34" charset="0"/>
+              <a:buNone/>
+            </a:pPr>
+            <a:r>
+              <a:rPr lang="en-US" sz="1800" dirty="0">
+                <a:latin typeface="Comic Sans MS" panose="030F0702030302020204" pitchFamily="66" charset="0"/>
+              </a:rPr>
+              <a:t>3) Put these values in order from smallest to greatest.</a:t>
+            </a:r>
+          </a:p>
+        </p:txBody>
+      </p:sp>
+      <mc:AlternateContent xmlns:mc="http://schemas.openxmlformats.org/markup-compatibility/2006" xmlns:a14="http://schemas.microsoft.com/office/drawing/2010/main">
+        <mc:Choice Requires="a14">
+          <p:sp>
+            <p:nvSpPr>
+              <p:cNvPr id="11" name="TextBox 10"/>
+              <p:cNvSpPr txBox="1"/>
+              <p:nvPr/>
+            </p:nvSpPr>
+            <p:spPr>
+              <a:xfrm>
+                <a:off x="3603009" y="5402308"/>
+                <a:ext cx="464024" cy="809452"/>
+              </a:xfrm>
+              <a:prstGeom prst="rect">
+                <a:avLst/>
+              </a:prstGeom>
+              <a:noFill/>
+            </p:spPr>
+            <p:txBody>
+              <a:bodyPr wrap="square" lIns="0" tIns="0" rIns="0" bIns="0" rtlCol="0">
+                <a:spAutoFit/>
+              </a:bodyPr>
+              <a:lstStyle/>
+              <a:p>
+                <a:pPr/>
+                <a14:m>
+                  <m:oMathPara xmlns:m="http://schemas.openxmlformats.org/officeDocument/2006/math">
+                    <m:oMathParaPr>
+                      <m:jc m:val="centerGroup"/>
+                    </m:oMathParaPr>
+                    <m:oMath xmlns:m="http://schemas.openxmlformats.org/officeDocument/2006/math">
+                      <m:f>
+                        <m:fPr>
+                          <m:ctrlPr>
+                            <a:rPr lang="en-US" sz="2800" i="1" smtClean="0">
+                              <a:latin typeface="Cambria Math" panose="02040503050406030204" pitchFamily="18" charset="0"/>
+                            </a:rPr>
+                          </m:ctrlPr>
+                        </m:fPr>
+                        <m:num>
+                          <m:r>
+                            <a:rPr lang="en-US" sz="2800" b="0" i="1" smtClean="0">
+                              <a:latin typeface="Cambria Math" panose="02040503050406030204" pitchFamily="18" charset="0"/>
+                            </a:rPr>
+                            <m:t>1</m:t>
+                          </m:r>
+                        </m:num>
+                        <m:den>
+                          <m:r>
+                            <a:rPr lang="en-US" sz="2800" b="0" i="1" smtClean="0">
+                              <a:latin typeface="Cambria Math" panose="02040503050406030204" pitchFamily="18" charset="0"/>
+                            </a:rPr>
+                            <m:t>10</m:t>
+                          </m:r>
+                        </m:den>
+                      </m:f>
+                    </m:oMath>
+                  </m:oMathPara>
+                </a14:m>
+                <a:endParaRPr lang="en-US" sz="2800" dirty="0">
+                  <a:latin typeface="Comic Sans MS" panose="030F0702030302020204" pitchFamily="66" charset="0"/>
+                </a:endParaRPr>
+              </a:p>
+            </p:txBody>
+          </p:sp>
+        </mc:Choice>
+        <mc:Fallback xmlns="">
+          <p:sp>
+            <p:nvSpPr>
+              <p:cNvPr id="11" name="TextBox 10"/>
+              <p:cNvSpPr txBox="1">
+                <a:spLocks noRot="1" noChangeAspect="1" noMove="1" noResize="1" noEditPoints="1" noAdjustHandles="1" noChangeArrowheads="1" noChangeShapeType="1" noTextEdit="1"/>
+              </p:cNvSpPr>
+              <p:nvPr/>
+            </p:nvSpPr>
+            <p:spPr>
+              <a:xfrm>
+                <a:off x="3603009" y="5402308"/>
+                <a:ext cx="464024" cy="809452"/>
+              </a:xfrm>
+              <a:prstGeom prst="rect">
+                <a:avLst/>
+              </a:prstGeom>
+              <a:blipFill>
+                <a:blip r:embed="rId2"/>
+                <a:stretch>
+                  <a:fillRect/>
+                </a:stretch>
+              </a:blipFill>
+            </p:spPr>
+            <p:txBody>
+              <a:bodyPr/>
+              <a:lstStyle/>
+              <a:p>
+                <a:r>
+                  <a:rPr lang="en-US">
+                    <a:noFill/>
+                  </a:rPr>
+                  <a:t> </a:t>
+                </a:r>
+              </a:p>
+            </p:txBody>
+          </p:sp>
+        </mc:Fallback>
+      </mc:AlternateContent>
+      <p:sp>
+        <p:nvSpPr>
+          <p:cNvPr id="13" name="TextBox 12"/>
+          <p:cNvSpPr txBox="1"/>
+          <p:nvPr/>
+        </p:nvSpPr>
+        <p:spPr>
+          <a:xfrm>
+            <a:off x="4449170" y="5617783"/>
+            <a:ext cx="805218" cy="430887"/>
+          </a:xfrm>
+          <a:prstGeom prst="rect">
+            <a:avLst/>
+          </a:prstGeom>
+          <a:noFill/>
+        </p:spPr>
+        <p:txBody>
+          <a:bodyPr wrap="square" lIns="0" tIns="0" rIns="0" bIns="0" rtlCol="0">
+            <a:spAutoFit/>
+          </a:bodyPr>
+          <a:lstStyle/>
+          <a:p>
+            <a:r>
+              <a:rPr lang="en-US" sz="2800" dirty="0">
+                <a:latin typeface="Comic Sans MS" panose="030F0702030302020204" pitchFamily="66" charset="0"/>
+              </a:rPr>
+              <a:t>0.03</a:t>
+            </a:r>
+          </a:p>
+        </p:txBody>
+      </p:sp>
+      <p:sp>
+        <p:nvSpPr>
+          <p:cNvPr id="14" name="TextBox 13"/>
+          <p:cNvSpPr txBox="1"/>
+          <p:nvPr/>
+        </p:nvSpPr>
+        <p:spPr>
+          <a:xfrm>
+            <a:off x="5527343" y="5617782"/>
+            <a:ext cx="805218" cy="430887"/>
+          </a:xfrm>
+          <a:prstGeom prst="rect">
+            <a:avLst/>
+          </a:prstGeom>
+          <a:noFill/>
+        </p:spPr>
+        <p:txBody>
+          <a:bodyPr wrap="square" lIns="0" tIns="0" rIns="0" bIns="0" rtlCol="0">
+            <a:spAutoFit/>
+          </a:bodyPr>
+          <a:lstStyle/>
+          <a:p>
+            <a:r>
+              <a:rPr lang="en-US" sz="2800" dirty="0">
+                <a:latin typeface="Comic Sans MS" panose="030F0702030302020204" pitchFamily="66" charset="0"/>
+              </a:rPr>
+              <a:t>45%</a:t>
+            </a:r>
+          </a:p>
+        </p:txBody>
+      </p:sp>
+      <mc:AlternateContent xmlns:mc="http://schemas.openxmlformats.org/markup-compatibility/2006" xmlns:a14="http://schemas.microsoft.com/office/drawing/2010/main">
+        <mc:Choice Requires="a14">
+          <p:sp>
+            <p:nvSpPr>
+              <p:cNvPr id="12" name="TextBox 11"/>
+              <p:cNvSpPr txBox="1"/>
+              <p:nvPr/>
+            </p:nvSpPr>
+            <p:spPr>
+              <a:xfrm>
+                <a:off x="2797780" y="3197959"/>
+                <a:ext cx="1201003" cy="553357"/>
+              </a:xfrm>
+              <a:prstGeom prst="rect">
+                <a:avLst/>
+              </a:prstGeom>
+              <a:noFill/>
+            </p:spPr>
+            <p:txBody>
+              <a:bodyPr wrap="square" rtlCol="0">
+                <a:spAutoFit/>
+              </a:bodyPr>
+              <a:lstStyle/>
+              <a:p>
+                <a:pPr/>
+                <a14:m>
+                  <m:oMathPara xmlns:m="http://schemas.openxmlformats.org/officeDocument/2006/math">
+                    <m:oMathParaPr>
+                      <m:jc m:val="centerGroup"/>
+                    </m:oMathParaPr>
+                    <m:oMath xmlns:m="http://schemas.openxmlformats.org/officeDocument/2006/math">
+                      <m:f>
+                        <m:fPr>
+                          <m:ctrlPr>
+                            <a:rPr lang="en-US" sz="1600" b="1" i="1" smtClean="0">
+                              <a:solidFill>
+                                <a:srgbClr val="FF0000"/>
+                              </a:solidFill>
+                              <a:latin typeface="Cambria Math" panose="02040503050406030204" pitchFamily="18" charset="0"/>
+                            </a:rPr>
+                          </m:ctrlPr>
+                        </m:fPr>
+                        <m:num>
+                          <m:r>
+                            <a:rPr lang="en-US" sz="1600" b="1" i="1" smtClean="0">
+                              <a:solidFill>
+                                <a:srgbClr val="FF0000"/>
+                              </a:solidFill>
+                              <a:latin typeface="Cambria Math" panose="02040503050406030204" pitchFamily="18" charset="0"/>
+                            </a:rPr>
+                            <m:t>𝟕</m:t>
+                          </m:r>
+                        </m:num>
+                        <m:den>
+                          <m:r>
+                            <a:rPr lang="en-US" sz="1600" b="1" i="1" smtClean="0">
+                              <a:solidFill>
+                                <a:srgbClr val="FF0000"/>
+                              </a:solidFill>
+                              <a:latin typeface="Cambria Math" panose="02040503050406030204" pitchFamily="18" charset="0"/>
+                            </a:rPr>
+                            <m:t>𝟏𝟎</m:t>
+                          </m:r>
+                        </m:den>
+                      </m:f>
+                    </m:oMath>
+                  </m:oMathPara>
+                </a14:m>
+                <a:endParaRPr lang="en-US" sz="1600" b="1" dirty="0">
+                  <a:latin typeface="Comic Sans MS" panose="030F0702030302020204" pitchFamily="66" charset="0"/>
+                </a:endParaRPr>
+              </a:p>
+            </p:txBody>
+          </p:sp>
+        </mc:Choice>
+        <mc:Fallback xmlns="">
+          <p:sp>
+            <p:nvSpPr>
+              <p:cNvPr id="12" name="TextBox 11"/>
+              <p:cNvSpPr txBox="1">
+                <a:spLocks noRot="1" noChangeAspect="1" noMove="1" noResize="1" noEditPoints="1" noAdjustHandles="1" noChangeArrowheads="1" noChangeShapeType="1" noTextEdit="1"/>
+              </p:cNvSpPr>
+              <p:nvPr/>
+            </p:nvSpPr>
+            <p:spPr>
+              <a:xfrm>
+                <a:off x="2797780" y="3197959"/>
+                <a:ext cx="1201003" cy="553357"/>
+              </a:xfrm>
+              <a:prstGeom prst="rect">
+                <a:avLst/>
+              </a:prstGeom>
+              <a:blipFill>
+                <a:blip r:embed="rId3"/>
+                <a:stretch>
+                  <a:fillRect/>
+                </a:stretch>
+              </a:blipFill>
+            </p:spPr>
+            <p:txBody>
+              <a:bodyPr/>
+              <a:lstStyle/>
+              <a:p>
+                <a:r>
+                  <a:rPr lang="en-US">
+                    <a:noFill/>
+                  </a:rPr>
+                  <a:t> </a:t>
+                </a:r>
+              </a:p>
+            </p:txBody>
+          </p:sp>
+        </mc:Fallback>
+      </mc:AlternateContent>
+      <p:sp>
+        <p:nvSpPr>
+          <p:cNvPr id="17" name="TextBox 16"/>
+          <p:cNvSpPr txBox="1"/>
+          <p:nvPr/>
+        </p:nvSpPr>
+        <p:spPr>
+          <a:xfrm>
+            <a:off x="5035258" y="3285818"/>
+            <a:ext cx="1060741" cy="400110"/>
+          </a:xfrm>
+          <a:prstGeom prst="rect">
+            <a:avLst/>
+          </a:prstGeom>
+          <a:noFill/>
+        </p:spPr>
+        <p:txBody>
+          <a:bodyPr wrap="square" rtlCol="0">
+            <a:spAutoFit/>
+          </a:bodyPr>
+          <a:lstStyle/>
+          <a:p>
+            <a:r>
+              <a:rPr lang="en-US" sz="2000" b="1" dirty="0">
+                <a:solidFill>
+                  <a:srgbClr val="FF0000"/>
+                </a:solidFill>
+                <a:latin typeface="Comic Sans MS" panose="030F0702030302020204" pitchFamily="66" charset="0"/>
+              </a:rPr>
+              <a:t>0.7</a:t>
+            </a:r>
+          </a:p>
+        </p:txBody>
+      </p:sp>
+      <p:sp>
+        <p:nvSpPr>
+          <p:cNvPr id="18" name="TextBox 17"/>
+          <p:cNvSpPr txBox="1"/>
+          <p:nvPr/>
+        </p:nvSpPr>
+        <p:spPr>
+          <a:xfrm>
+            <a:off x="3962369" y="3263781"/>
+            <a:ext cx="1060741" cy="400110"/>
+          </a:xfrm>
+          <a:prstGeom prst="rect">
+            <a:avLst/>
+          </a:prstGeom>
+          <a:noFill/>
+        </p:spPr>
+        <p:txBody>
+          <a:bodyPr wrap="square" rtlCol="0">
+            <a:spAutoFit/>
+          </a:bodyPr>
+          <a:lstStyle/>
+          <a:p>
+            <a:r>
+              <a:rPr lang="en-US" sz="2000" b="1" dirty="0">
+                <a:solidFill>
+                  <a:srgbClr val="FF0000"/>
+                </a:solidFill>
+                <a:latin typeface="Comic Sans MS" panose="030F0702030302020204" pitchFamily="66" charset="0"/>
+              </a:rPr>
+              <a:t>70%</a:t>
+            </a:r>
+          </a:p>
+        </p:txBody>
+      </p:sp>
+      <p:sp>
+        <p:nvSpPr>
+          <p:cNvPr id="19" name="TextBox 18"/>
+          <p:cNvSpPr txBox="1"/>
+          <p:nvPr/>
+        </p:nvSpPr>
+        <p:spPr>
+          <a:xfrm>
+            <a:off x="9138278" y="3301351"/>
+            <a:ext cx="1064525" cy="461665"/>
+          </a:xfrm>
+          <a:prstGeom prst="rect">
+            <a:avLst/>
+          </a:prstGeom>
+          <a:noFill/>
+        </p:spPr>
+        <p:txBody>
+          <a:bodyPr wrap="square" rtlCol="0">
+            <a:spAutoFit/>
+          </a:bodyPr>
+          <a:lstStyle/>
+          <a:p>
+            <a:r>
+              <a:rPr lang="en-US" sz="2400" b="1" dirty="0">
+                <a:solidFill>
+                  <a:srgbClr val="FF0000"/>
+                </a:solidFill>
+                <a:latin typeface="Comic Sans MS" panose="030F0702030302020204" pitchFamily="66" charset="0"/>
+              </a:rPr>
+              <a:t>20%</a:t>
+            </a:r>
+          </a:p>
+        </p:txBody>
+      </p:sp>
+      <p:sp>
+        <p:nvSpPr>
+          <p:cNvPr id="20" name="TextBox 19"/>
+          <p:cNvSpPr txBox="1"/>
+          <p:nvPr/>
+        </p:nvSpPr>
+        <p:spPr>
+          <a:xfrm>
+            <a:off x="10673535" y="3325722"/>
+            <a:ext cx="1064525" cy="461665"/>
+          </a:xfrm>
+          <a:prstGeom prst="rect">
+            <a:avLst/>
+          </a:prstGeom>
+          <a:noFill/>
+        </p:spPr>
+        <p:txBody>
+          <a:bodyPr wrap="square" rtlCol="0">
+            <a:spAutoFit/>
+          </a:bodyPr>
+          <a:lstStyle/>
+          <a:p>
+            <a:r>
+              <a:rPr lang="en-US" sz="2400" b="1" dirty="0">
+                <a:solidFill>
+                  <a:srgbClr val="FF0000"/>
+                </a:solidFill>
+                <a:latin typeface="Comic Sans MS" panose="030F0702030302020204" pitchFamily="66" charset="0"/>
+              </a:rPr>
+              <a:t>0.2</a:t>
+            </a:r>
+          </a:p>
+        </p:txBody>
+      </p:sp>
+      <mc:AlternateContent xmlns:mc="http://schemas.openxmlformats.org/markup-compatibility/2006" xmlns:a14="http://schemas.microsoft.com/office/drawing/2010/main">
+        <mc:Choice Requires="a14">
+          <p:sp>
+            <p:nvSpPr>
+              <p:cNvPr id="22" name="TextBox 21"/>
+              <p:cNvSpPr txBox="1"/>
+              <p:nvPr/>
+            </p:nvSpPr>
+            <p:spPr>
+              <a:xfrm>
+                <a:off x="7858428" y="3958201"/>
+                <a:ext cx="464024" cy="520463"/>
+              </a:xfrm>
+              <a:prstGeom prst="rect">
+                <a:avLst/>
+              </a:prstGeom>
+              <a:noFill/>
+            </p:spPr>
+            <p:txBody>
+              <a:bodyPr wrap="square" lIns="0" tIns="0" rIns="0" bIns="0" rtlCol="0">
+                <a:spAutoFit/>
+              </a:bodyPr>
+              <a:lstStyle/>
+              <a:p>
+                <a:pPr/>
+                <a14:m>
+                  <m:oMathPara xmlns:m="http://schemas.openxmlformats.org/officeDocument/2006/math">
+                    <m:oMathParaPr>
+                      <m:jc m:val="centerGroup"/>
+                    </m:oMathParaPr>
+                    <m:oMath xmlns:m="http://schemas.openxmlformats.org/officeDocument/2006/math">
+                      <m:f>
+                        <m:fPr>
+                          <m:ctrlPr>
+                            <a:rPr lang="en-US" b="1" i="1" smtClean="0">
+                              <a:solidFill>
+                                <a:srgbClr val="FF0000"/>
+                              </a:solidFill>
+                              <a:latin typeface="Cambria Math" panose="02040503050406030204" pitchFamily="18" charset="0"/>
+                            </a:rPr>
+                          </m:ctrlPr>
+                        </m:fPr>
+                        <m:num>
+                          <m:r>
+                            <a:rPr lang="en-US" b="1" i="1" smtClean="0">
+                              <a:solidFill>
+                                <a:srgbClr val="FF0000"/>
+                              </a:solidFill>
+                              <a:latin typeface="Cambria Math" panose="02040503050406030204" pitchFamily="18" charset="0"/>
+                            </a:rPr>
+                            <m:t>𝟗</m:t>
+                          </m:r>
+                        </m:num>
+                        <m:den>
+                          <m:r>
+                            <a:rPr lang="en-US" b="1" i="1" smtClean="0">
+                              <a:solidFill>
+                                <a:srgbClr val="FF0000"/>
+                              </a:solidFill>
+                              <a:latin typeface="Cambria Math" panose="02040503050406030204" pitchFamily="18" charset="0"/>
+                            </a:rPr>
+                            <m:t>𝟓</m:t>
+                          </m:r>
+                        </m:den>
+                      </m:f>
+                    </m:oMath>
+                  </m:oMathPara>
+                </a14:m>
+                <a:endParaRPr lang="en-US" sz="2800" b="1" dirty="0">
+                  <a:latin typeface="Comic Sans MS" panose="030F0702030302020204" pitchFamily="66" charset="0"/>
+                </a:endParaRPr>
+              </a:p>
+            </p:txBody>
+          </p:sp>
+        </mc:Choice>
+        <mc:Fallback xmlns="">
+          <p:sp>
+            <p:nvSpPr>
+              <p:cNvPr id="22" name="TextBox 21"/>
+              <p:cNvSpPr txBox="1">
+                <a:spLocks noRot="1" noChangeAspect="1" noMove="1" noResize="1" noEditPoints="1" noAdjustHandles="1" noChangeArrowheads="1" noChangeShapeType="1" noTextEdit="1"/>
+              </p:cNvSpPr>
+              <p:nvPr/>
+            </p:nvSpPr>
+            <p:spPr>
+              <a:xfrm>
+                <a:off x="7858428" y="3958201"/>
+                <a:ext cx="464024" cy="520463"/>
+              </a:xfrm>
+              <a:prstGeom prst="rect">
+                <a:avLst/>
+              </a:prstGeom>
+              <a:blipFill>
+                <a:blip r:embed="rId4"/>
+                <a:stretch>
+                  <a:fillRect/>
+                </a:stretch>
+              </a:blipFill>
+            </p:spPr>
+            <p:txBody>
+              <a:bodyPr/>
+              <a:lstStyle/>
+              <a:p>
+                <a:r>
+                  <a:rPr lang="en-US">
+                    <a:noFill/>
+                  </a:rPr>
+                  <a:t> </a:t>
+                </a:r>
+              </a:p>
+            </p:txBody>
+          </p:sp>
+        </mc:Fallback>
+      </mc:AlternateContent>
+      <p:sp>
+        <p:nvSpPr>
+          <p:cNvPr id="23" name="TextBox 22"/>
+          <p:cNvSpPr txBox="1"/>
+          <p:nvPr/>
+        </p:nvSpPr>
+        <p:spPr>
+          <a:xfrm>
+            <a:off x="9138278" y="3958201"/>
+            <a:ext cx="1064525" cy="461665"/>
+          </a:xfrm>
+          <a:prstGeom prst="rect">
+            <a:avLst/>
+          </a:prstGeom>
+          <a:noFill/>
+        </p:spPr>
+        <p:txBody>
+          <a:bodyPr wrap="square" rtlCol="0">
+            <a:spAutoFit/>
+          </a:bodyPr>
+          <a:lstStyle/>
+          <a:p>
+            <a:r>
+              <a:rPr lang="en-US" sz="2400" b="1" dirty="0">
+                <a:solidFill>
+                  <a:srgbClr val="FF0000"/>
+                </a:solidFill>
+                <a:latin typeface="Comic Sans MS" panose="030F0702030302020204" pitchFamily="66" charset="0"/>
+              </a:rPr>
+              <a:t>180%</a:t>
+            </a:r>
+          </a:p>
+        </p:txBody>
+      </p:sp>
+      <p:sp>
+        <p:nvSpPr>
+          <p:cNvPr id="24" name="TextBox 23"/>
+          <p:cNvSpPr txBox="1"/>
+          <p:nvPr/>
+        </p:nvSpPr>
+        <p:spPr>
+          <a:xfrm>
+            <a:off x="7522715" y="5204378"/>
+            <a:ext cx="1135447" cy="523220"/>
+          </a:xfrm>
+          <a:prstGeom prst="rect">
+            <a:avLst/>
+          </a:prstGeom>
+          <a:noFill/>
+        </p:spPr>
+        <p:txBody>
+          <a:bodyPr wrap="square" rtlCol="0">
+            <a:spAutoFit/>
+          </a:bodyPr>
+          <a:lstStyle/>
+          <a:p>
+            <a:r>
+              <a:rPr lang="en-US" sz="2800" b="1" dirty="0">
+                <a:solidFill>
+                  <a:srgbClr val="FF0000"/>
+                </a:solidFill>
+                <a:latin typeface="Comic Sans MS" panose="030F0702030302020204" pitchFamily="66" charset="0"/>
+              </a:rPr>
+              <a:t>0.03</a:t>
+            </a:r>
+          </a:p>
+        </p:txBody>
+      </p:sp>
+      <mc:AlternateContent xmlns:mc="http://schemas.openxmlformats.org/markup-compatibility/2006" xmlns:a14="http://schemas.microsoft.com/office/drawing/2010/main">
+        <mc:Choice Requires="a14">
+          <p:sp>
+            <p:nvSpPr>
+              <p:cNvPr id="26" name="TextBox 25"/>
+              <p:cNvSpPr txBox="1"/>
+              <p:nvPr/>
+            </p:nvSpPr>
+            <p:spPr>
+              <a:xfrm>
+                <a:off x="8831560" y="4985277"/>
+                <a:ext cx="464024" cy="809452"/>
+              </a:xfrm>
+              <a:prstGeom prst="rect">
+                <a:avLst/>
+              </a:prstGeom>
+              <a:noFill/>
+            </p:spPr>
+            <p:txBody>
+              <a:bodyPr wrap="square" lIns="0" tIns="0" rIns="0" bIns="0" rtlCol="0">
+                <a:spAutoFit/>
+              </a:bodyPr>
+              <a:lstStyle/>
+              <a:p>
+                <a:pPr/>
+                <a14:m>
+                  <m:oMathPara xmlns:m="http://schemas.openxmlformats.org/officeDocument/2006/math">
+                    <m:oMathParaPr>
+                      <m:jc m:val="centerGroup"/>
+                    </m:oMathParaPr>
+                    <m:oMath xmlns:m="http://schemas.openxmlformats.org/officeDocument/2006/math">
+                      <m:f>
+                        <m:fPr>
+                          <m:ctrlPr>
+                            <a:rPr lang="en-US" sz="2800" b="1" i="1" smtClean="0">
+                              <a:solidFill>
+                                <a:srgbClr val="FF0000"/>
+                              </a:solidFill>
+                              <a:latin typeface="Cambria Math" panose="02040503050406030204" pitchFamily="18" charset="0"/>
+                            </a:rPr>
+                          </m:ctrlPr>
+                        </m:fPr>
+                        <m:num>
+                          <m:r>
+                            <a:rPr lang="en-US" sz="2800" b="1" i="1" smtClean="0">
+                              <a:solidFill>
+                                <a:srgbClr val="FF0000"/>
+                              </a:solidFill>
+                              <a:latin typeface="Cambria Math" panose="02040503050406030204" pitchFamily="18" charset="0"/>
+                            </a:rPr>
+                            <m:t>𝟏</m:t>
+                          </m:r>
+                        </m:num>
+                        <m:den>
+                          <m:r>
+                            <a:rPr lang="en-US" sz="2800" b="1" i="1" smtClean="0">
+                              <a:solidFill>
+                                <a:srgbClr val="FF0000"/>
+                              </a:solidFill>
+                              <a:latin typeface="Cambria Math" panose="02040503050406030204" pitchFamily="18" charset="0"/>
+                            </a:rPr>
+                            <m:t>𝟏𝟎</m:t>
+                          </m:r>
+                        </m:den>
+                      </m:f>
+                    </m:oMath>
+                  </m:oMathPara>
+                </a14:m>
+                <a:endParaRPr lang="en-US" sz="2800" b="1" dirty="0">
+                  <a:latin typeface="Comic Sans MS" panose="030F0702030302020204" pitchFamily="66" charset="0"/>
+                </a:endParaRPr>
+              </a:p>
+            </p:txBody>
+          </p:sp>
+        </mc:Choice>
+        <mc:Fallback xmlns="">
+          <p:sp>
+            <p:nvSpPr>
+              <p:cNvPr id="26" name="TextBox 25"/>
+              <p:cNvSpPr txBox="1">
+                <a:spLocks noRot="1" noChangeAspect="1" noMove="1" noResize="1" noEditPoints="1" noAdjustHandles="1" noChangeArrowheads="1" noChangeShapeType="1" noTextEdit="1"/>
+              </p:cNvSpPr>
+              <p:nvPr/>
+            </p:nvSpPr>
+            <p:spPr>
+              <a:xfrm>
+                <a:off x="8831560" y="4985277"/>
+                <a:ext cx="464024" cy="809452"/>
+              </a:xfrm>
+              <a:prstGeom prst="rect">
+                <a:avLst/>
+              </a:prstGeom>
+              <a:blipFill>
+                <a:blip r:embed="rId5"/>
+                <a:stretch>
+                  <a:fillRect/>
+                </a:stretch>
+              </a:blipFill>
+            </p:spPr>
+            <p:txBody>
+              <a:bodyPr/>
+              <a:lstStyle/>
+              <a:p>
+                <a:r>
+                  <a:rPr lang="en-US">
+                    <a:noFill/>
+                  </a:rPr>
+                  <a:t> </a:t>
+                </a:r>
+              </a:p>
+            </p:txBody>
+          </p:sp>
+        </mc:Fallback>
+      </mc:AlternateContent>
+      <p:sp>
+        <p:nvSpPr>
+          <p:cNvPr id="27" name="TextBox 26"/>
+          <p:cNvSpPr txBox="1"/>
+          <p:nvPr/>
+        </p:nvSpPr>
+        <p:spPr>
+          <a:xfrm>
+            <a:off x="9538088" y="5154586"/>
+            <a:ext cx="1135447" cy="523220"/>
+          </a:xfrm>
+          <a:prstGeom prst="rect">
+            <a:avLst/>
+          </a:prstGeom>
+          <a:noFill/>
+        </p:spPr>
+        <p:txBody>
+          <a:bodyPr wrap="square" rtlCol="0">
+            <a:spAutoFit/>
+          </a:bodyPr>
+          <a:lstStyle/>
+          <a:p>
+            <a:r>
+              <a:rPr lang="en-US" sz="2800" b="1" dirty="0">
+                <a:solidFill>
+                  <a:srgbClr val="FF0000"/>
+                </a:solidFill>
+                <a:latin typeface="Comic Sans MS" panose="030F0702030302020204" pitchFamily="66" charset="0"/>
+              </a:rPr>
+              <a:t>45%</a:t>
+            </a:r>
+          </a:p>
+        </p:txBody>
+      </p:sp>
+      <p:pic>
+        <p:nvPicPr>
+          <p:cNvPr id="25" name="Picture 24">
+            <a:extLst>
+              <a:ext uri="{FF2B5EF4-FFF2-40B4-BE49-F238E27FC236}">
+                <a16:creationId xmlns:a16="http://schemas.microsoft.com/office/drawing/2014/main" id="{E53E8CAC-8926-4B1A-BFD1-D826E3BAC568}"/>
+              </a:ext>
+            </a:extLst>
+          </p:cNvPr>
+          <p:cNvPicPr>
+            <a:picLocks noChangeAspect="1"/>
+          </p:cNvPicPr>
+          <p:nvPr/>
+        </p:nvPicPr>
+        <p:blipFill>
+          <a:blip r:embed="rId6"/>
+          <a:stretch>
+            <a:fillRect/>
+          </a:stretch>
+        </p:blipFill>
+        <p:spPr>
+          <a:xfrm>
+            <a:off x="851706" y="2137441"/>
+            <a:ext cx="1701887" cy="1663786"/>
+          </a:xfrm>
+          <a:prstGeom prst="rect">
+            <a:avLst/>
+          </a:prstGeom>
+        </p:spPr>
+      </p:pic>
+      <mc:AlternateContent xmlns:mc="http://schemas.openxmlformats.org/markup-compatibility/2006" xmlns:a14="http://schemas.microsoft.com/office/drawing/2010/main">
+        <mc:Choice Requires="a14">
+          <p:sp>
+            <p:nvSpPr>
+              <p:cNvPr id="29" name="TextBox 28">
+                <a:extLst>
+                  <a:ext uri="{FF2B5EF4-FFF2-40B4-BE49-F238E27FC236}">
+                    <a16:creationId xmlns:a16="http://schemas.microsoft.com/office/drawing/2014/main" id="{59583639-CA16-493E-B2CD-286F91AEDCBC}"/>
+                  </a:ext>
+                </a:extLst>
+              </p:cNvPr>
+              <p:cNvSpPr txBox="1"/>
+              <p:nvPr/>
+            </p:nvSpPr>
+            <p:spPr>
+              <a:xfrm>
+                <a:off x="7858427" y="3313201"/>
+                <a:ext cx="464024" cy="518604"/>
+              </a:xfrm>
+              <a:prstGeom prst="rect">
+                <a:avLst/>
+              </a:prstGeom>
+              <a:noFill/>
+            </p:spPr>
+            <p:txBody>
+              <a:bodyPr wrap="square" lIns="0" tIns="0" rIns="0" bIns="0" rtlCol="0">
+                <a:spAutoFit/>
+              </a:bodyPr>
+              <a:lstStyle/>
+              <a:p>
+                <a:pPr/>
+                <a14:m>
+                  <m:oMathPara xmlns:m="http://schemas.openxmlformats.org/officeDocument/2006/math">
+                    <m:oMathParaPr>
+                      <m:jc m:val="centerGroup"/>
+                    </m:oMathParaPr>
+                    <m:oMath xmlns:m="http://schemas.openxmlformats.org/officeDocument/2006/math">
+                      <m:f>
+                        <m:fPr>
+                          <m:ctrlPr>
+                            <a:rPr lang="en-US" b="1" i="1" smtClean="0">
+                              <a:solidFill>
+                                <a:schemeClr val="tx1"/>
+                              </a:solidFill>
+                              <a:latin typeface="Cambria Math" panose="02040503050406030204" pitchFamily="18" charset="0"/>
+                            </a:rPr>
+                          </m:ctrlPr>
+                        </m:fPr>
+                        <m:num>
+                          <m:r>
+                            <a:rPr lang="en-US" b="1" i="1" smtClean="0">
+                              <a:solidFill>
+                                <a:schemeClr val="tx1"/>
+                              </a:solidFill>
+                              <a:latin typeface="Cambria Math" panose="02040503050406030204" pitchFamily="18" charset="0"/>
+                            </a:rPr>
+                            <m:t>𝟏</m:t>
+                          </m:r>
+                        </m:num>
+                        <m:den>
+                          <m:r>
+                            <a:rPr lang="en-US" b="1" i="1" smtClean="0">
+                              <a:solidFill>
+                                <a:schemeClr val="tx1"/>
+                              </a:solidFill>
+                              <a:latin typeface="Cambria Math" panose="02040503050406030204" pitchFamily="18" charset="0"/>
+                            </a:rPr>
+                            <m:t>𝟓</m:t>
+                          </m:r>
+                        </m:den>
+                      </m:f>
+                    </m:oMath>
+                  </m:oMathPara>
+                </a14:m>
+                <a:endParaRPr lang="en-US" sz="2800" b="1" dirty="0">
+                  <a:solidFill>
+                    <a:schemeClr val="tx1"/>
+                  </a:solidFill>
+                  <a:latin typeface="Comic Sans MS" panose="030F0702030302020204" pitchFamily="66" charset="0"/>
+                </a:endParaRPr>
+              </a:p>
+            </p:txBody>
+          </p:sp>
+        </mc:Choice>
+        <mc:Fallback xmlns="">
+          <p:sp>
+            <p:nvSpPr>
+              <p:cNvPr id="29" name="TextBox 28">
+                <a:extLst>
+                  <a:ext uri="{FF2B5EF4-FFF2-40B4-BE49-F238E27FC236}">
+                    <a16:creationId xmlns:a16="http://schemas.microsoft.com/office/drawing/2014/main" id="{59583639-CA16-493E-B2CD-286F91AEDCBC}"/>
+                  </a:ext>
+                </a:extLst>
+              </p:cNvPr>
+              <p:cNvSpPr txBox="1">
+                <a:spLocks noRot="1" noChangeAspect="1" noMove="1" noResize="1" noEditPoints="1" noAdjustHandles="1" noChangeArrowheads="1" noChangeShapeType="1" noTextEdit="1"/>
+              </p:cNvSpPr>
+              <p:nvPr/>
+            </p:nvSpPr>
+            <p:spPr>
+              <a:xfrm>
+                <a:off x="7858427" y="3313201"/>
+                <a:ext cx="464024" cy="518604"/>
+              </a:xfrm>
+              <a:prstGeom prst="rect">
+                <a:avLst/>
+              </a:prstGeom>
+              <a:blipFill>
+                <a:blip r:embed="rId7"/>
+                <a:stretch>
+                  <a:fillRect/>
+                </a:stretch>
+              </a:blipFill>
+            </p:spPr>
+            <p:txBody>
+              <a:bodyPr/>
+              <a:lstStyle/>
+              <a:p>
+                <a:r>
+                  <a:rPr lang="en-US">
+                    <a:noFill/>
+                  </a:rPr>
+                  <a:t> </a:t>
+                </a:r>
+              </a:p>
+            </p:txBody>
+          </p:sp>
+        </mc:Fallback>
+      </mc:AlternateContent>
+    </p:spTree>
+    <p:extLst>
+      <p:ext uri="{BB962C8B-B14F-4D97-AF65-F5344CB8AC3E}">
+        <p14:creationId xmlns:p14="http://schemas.microsoft.com/office/powerpoint/2010/main" val="2439896404"/>
+      </p:ext>
+    </p:extLst>
+  </p:cSld>
+  <p:clrMapOvr>
+    <a:masterClrMapping/>
+  </p:clrMapOvr>
+  <p:timing>
+    <p:tnLst>
+      <p:par>
+        <p:cTn id="1" dur="indefinite" restart="never" nodeType="tmRoot">
+          <p:childTnLst>
+            <p:seq concurrent="1" nextAc="seek">
+              <p:cTn id="2" dur="indefinite" nodeType="mainSeq">
+                <p:childTnLst>
+                  <p:par>
+                    <p:cTn id="3" fill="hold">
+                      <p:stCondLst>
+                        <p:cond delay="indefinite"/>
+                      </p:stCondLst>
+                      <p:childTnLst>
+                        <p:par>
+                          <p:cTn id="4" fill="hold">
+                            <p:stCondLst>
+                              <p:cond delay="0"/>
+                            </p:stCondLst>
+                            <p:childTnLst>
+                              <p:par>
+                                <p:cTn id="5" presetID="10" presetClass="entr" presetSubtype="0" fill="hold" grpId="0" nodeType="clickEffect">
+                                  <p:stCondLst>
+                                    <p:cond delay="0"/>
+                                  </p:stCondLst>
+                                  <p:childTnLst>
+                                    <p:set>
+                                      <p:cBhvr>
+                                        <p:cTn id="6" dur="1" fill="hold">
+                                          <p:stCondLst>
+                                            <p:cond delay="0"/>
+                                          </p:stCondLst>
+                                        </p:cTn>
+                                        <p:tgtEl>
+                                          <p:spTgt spid="12"/>
+                                        </p:tgtEl>
+                                        <p:attrNameLst>
+                                          <p:attrName>style.visibility</p:attrName>
+                                        </p:attrNameLst>
+                                      </p:cBhvr>
+                                      <p:to>
+                                        <p:strVal val="visible"/>
+                                      </p:to>
+                                    </p:set>
+                                    <p:animEffect transition="in" filter="fade">
+                                      <p:cBhvr>
+                                        <p:cTn id="7" dur="500"/>
+                                        <p:tgtEl>
+                                          <p:spTgt spid="12"/>
+                                        </p:tgtEl>
+                                      </p:cBhvr>
+                                    </p:animEffect>
+                                  </p:childTnLst>
+                                </p:cTn>
+                              </p:par>
+                            </p:childTnLst>
+                          </p:cTn>
+                        </p:par>
+                      </p:childTnLst>
+                    </p:cTn>
+                  </p:par>
+                  <p:par>
+                    <p:cTn id="8" fill="hold">
+                      <p:stCondLst>
+                        <p:cond delay="indefinite"/>
+                      </p:stCondLst>
+                      <p:childTnLst>
+                        <p:par>
+                          <p:cTn id="9" fill="hold">
+                            <p:stCondLst>
+                              <p:cond delay="0"/>
+                            </p:stCondLst>
+                            <p:childTnLst>
+                              <p:par>
+                                <p:cTn id="10" presetID="10" presetClass="entr" presetSubtype="0" fill="hold" grpId="0" nodeType="clickEffect">
+                                  <p:stCondLst>
+                                    <p:cond delay="0"/>
+                                  </p:stCondLst>
+                                  <p:childTnLst>
+                                    <p:set>
+                                      <p:cBhvr>
+                                        <p:cTn id="11" dur="1" fill="hold">
+                                          <p:stCondLst>
+                                            <p:cond delay="0"/>
+                                          </p:stCondLst>
+                                        </p:cTn>
+                                        <p:tgtEl>
+                                          <p:spTgt spid="18"/>
+                                        </p:tgtEl>
+                                        <p:attrNameLst>
+                                          <p:attrName>style.visibility</p:attrName>
+                                        </p:attrNameLst>
+                                      </p:cBhvr>
+                                      <p:to>
+                                        <p:strVal val="visible"/>
+                                      </p:to>
+                                    </p:set>
+                                    <p:animEffect transition="in" filter="fade">
+                                      <p:cBhvr>
+                                        <p:cTn id="12" dur="500"/>
+                                        <p:tgtEl>
+                                          <p:spTgt spid="18"/>
+                                        </p:tgtEl>
+                                      </p:cBhvr>
+                                    </p:animEffect>
+                                  </p:childTnLst>
+                                </p:cTn>
+                              </p:par>
+                            </p:childTnLst>
+                          </p:cTn>
+                        </p:par>
+                      </p:childTnLst>
+                    </p:cTn>
+                  </p:par>
+                  <p:par>
+                    <p:cTn id="13" fill="hold">
+                      <p:stCondLst>
+                        <p:cond delay="indefinite"/>
+                      </p:stCondLst>
+                      <p:childTnLst>
+                        <p:par>
+                          <p:cTn id="14" fill="hold">
+                            <p:stCondLst>
+                              <p:cond delay="0"/>
+                            </p:stCondLst>
+                            <p:childTnLst>
+                              <p:par>
+                                <p:cTn id="15" presetID="10" presetClass="entr" presetSubtype="0" fill="hold" grpId="0" nodeType="clickEffect">
+                                  <p:stCondLst>
+                                    <p:cond delay="0"/>
+                                  </p:stCondLst>
+                                  <p:childTnLst>
+                                    <p:set>
+                                      <p:cBhvr>
+                                        <p:cTn id="16" dur="1" fill="hold">
+                                          <p:stCondLst>
+                                            <p:cond delay="0"/>
+                                          </p:stCondLst>
+                                        </p:cTn>
+                                        <p:tgtEl>
+                                          <p:spTgt spid="17"/>
+                                        </p:tgtEl>
+                                        <p:attrNameLst>
+                                          <p:attrName>style.visibility</p:attrName>
+                                        </p:attrNameLst>
+                                      </p:cBhvr>
+                                      <p:to>
+                                        <p:strVal val="visible"/>
+                                      </p:to>
+                                    </p:set>
+                                    <p:animEffect transition="in" filter="fade">
+                                      <p:cBhvr>
+                                        <p:cTn id="17" dur="500"/>
+                                        <p:tgtEl>
+                                          <p:spTgt spid="17"/>
+                                        </p:tgtEl>
+                                      </p:cBhvr>
+                                    </p:animEffect>
+                                  </p:childTnLst>
+                                </p:cTn>
+                              </p:par>
+                            </p:childTnLst>
+                          </p:cTn>
+                        </p:par>
+                      </p:childTnLst>
+                    </p:cTn>
+                  </p:par>
+                  <p:par>
+                    <p:cTn id="18" fill="hold">
+                      <p:stCondLst>
+                        <p:cond delay="indefinite"/>
+                      </p:stCondLst>
+                      <p:childTnLst>
+                        <p:par>
+                          <p:cTn id="19" fill="hold">
+                            <p:stCondLst>
+                              <p:cond delay="0"/>
+                            </p:stCondLst>
+                            <p:childTnLst>
+                              <p:par>
+                                <p:cTn id="20" presetID="10" presetClass="entr" presetSubtype="0" fill="hold" grpId="0" nodeType="clickEffect">
+                                  <p:stCondLst>
+                                    <p:cond delay="0"/>
+                                  </p:stCondLst>
+                                  <p:childTnLst>
+                                    <p:set>
+                                      <p:cBhvr>
+                                        <p:cTn id="21" dur="1" fill="hold">
+                                          <p:stCondLst>
+                                            <p:cond delay="0"/>
+                                          </p:stCondLst>
+                                        </p:cTn>
+                                        <p:tgtEl>
+                                          <p:spTgt spid="19"/>
+                                        </p:tgtEl>
+                                        <p:attrNameLst>
+                                          <p:attrName>style.visibility</p:attrName>
+                                        </p:attrNameLst>
+                                      </p:cBhvr>
+                                      <p:to>
+                                        <p:strVal val="visible"/>
+                                      </p:to>
+                                    </p:set>
+                                    <p:animEffect transition="in" filter="fade">
+                                      <p:cBhvr>
+                                        <p:cTn id="22" dur="500"/>
+                                        <p:tgtEl>
+                                          <p:spTgt spid="19"/>
+                                        </p:tgtEl>
+                                      </p:cBhvr>
+                                    </p:animEffect>
+                                  </p:childTnLst>
+                                </p:cTn>
+                              </p:par>
+                            </p:childTnLst>
+                          </p:cTn>
+                        </p:par>
+                      </p:childTnLst>
+                    </p:cTn>
+                  </p:par>
+                  <p:par>
+                    <p:cTn id="23" fill="hold">
+                      <p:stCondLst>
+                        <p:cond delay="indefinite"/>
+                      </p:stCondLst>
+                      <p:childTnLst>
+                        <p:par>
+                          <p:cTn id="24" fill="hold">
+                            <p:stCondLst>
+                              <p:cond delay="0"/>
+                            </p:stCondLst>
+                            <p:childTnLst>
+                              <p:par>
+                                <p:cTn id="25" presetID="10" presetClass="entr" presetSubtype="0" fill="hold" grpId="0" nodeType="clickEffect">
+                                  <p:stCondLst>
+                                    <p:cond delay="0"/>
+                                  </p:stCondLst>
+                                  <p:childTnLst>
+                                    <p:set>
+                                      <p:cBhvr>
+                                        <p:cTn id="26" dur="1" fill="hold">
+                                          <p:stCondLst>
+                                            <p:cond delay="0"/>
+                                          </p:stCondLst>
+                                        </p:cTn>
+                                        <p:tgtEl>
+                                          <p:spTgt spid="20"/>
+                                        </p:tgtEl>
+                                        <p:attrNameLst>
+                                          <p:attrName>style.visibility</p:attrName>
+                                        </p:attrNameLst>
+                                      </p:cBhvr>
+                                      <p:to>
+                                        <p:strVal val="visible"/>
+                                      </p:to>
+                                    </p:set>
+                                    <p:animEffect transition="in" filter="fade">
+                                      <p:cBhvr>
+                                        <p:cTn id="27" dur="500"/>
+                                        <p:tgtEl>
+                                          <p:spTgt spid="20"/>
+                                        </p:tgtEl>
+                                      </p:cBhvr>
+                                    </p:animEffect>
+                                  </p:childTnLst>
+                                </p:cTn>
+                              </p:par>
+                            </p:childTnLst>
+                          </p:cTn>
+                        </p:par>
+                      </p:childTnLst>
+                    </p:cTn>
+                  </p:par>
+                  <p:par>
+                    <p:cTn id="28" fill="hold">
+                      <p:stCondLst>
+                        <p:cond delay="indefinite"/>
+                      </p:stCondLst>
+                      <p:childTnLst>
+                        <p:par>
+                          <p:cTn id="29" fill="hold">
+                            <p:stCondLst>
+                              <p:cond delay="0"/>
+                            </p:stCondLst>
+                            <p:childTnLst>
+                              <p:par>
+                                <p:cTn id="30" presetID="10" presetClass="entr" presetSubtype="0" fill="hold" nodeType="clickEffect">
+                                  <p:stCondLst>
+                                    <p:cond delay="0"/>
+                                  </p:stCondLst>
+                                  <p:childTnLst>
+                                    <p:set>
+                                      <p:cBhvr>
+                                        <p:cTn id="31" dur="1" fill="hold">
+                                          <p:stCondLst>
+                                            <p:cond delay="0"/>
+                                          </p:stCondLst>
+                                        </p:cTn>
+                                        <p:tgtEl>
+                                          <p:spTgt spid="22">
+                                            <p:txEl>
+                                              <p:pRg st="0" end="0"/>
+                                            </p:txEl>
+                                          </p:spTgt>
+                                        </p:tgtEl>
+                                        <p:attrNameLst>
+                                          <p:attrName>style.visibility</p:attrName>
+                                        </p:attrNameLst>
+                                      </p:cBhvr>
+                                      <p:to>
+                                        <p:strVal val="visible"/>
+                                      </p:to>
+                                    </p:set>
+                                    <p:animEffect transition="in" filter="fade">
+                                      <p:cBhvr>
+                                        <p:cTn id="32" dur="500"/>
+                                        <p:tgtEl>
+                                          <p:spTgt spid="22">
+                                            <p:txEl>
+                                              <p:pRg st="0" end="0"/>
+                                            </p:txEl>
+                                          </p:spTgt>
+                                        </p:tgtEl>
+                                      </p:cBhvr>
+                                    </p:animEffect>
+                                  </p:childTnLst>
+                                </p:cTn>
+                              </p:par>
+                            </p:childTnLst>
+                          </p:cTn>
+                        </p:par>
+                      </p:childTnLst>
+                    </p:cTn>
+                  </p:par>
+                  <p:par>
+                    <p:cTn id="33" fill="hold">
+                      <p:stCondLst>
+                        <p:cond delay="indefinite"/>
+                      </p:stCondLst>
+                      <p:childTnLst>
+                        <p:par>
+                          <p:cTn id="34" fill="hold">
+                            <p:stCondLst>
+                              <p:cond delay="0"/>
+                            </p:stCondLst>
+                            <p:childTnLst>
+                              <p:par>
+                                <p:cTn id="35" presetID="10" presetClass="entr" presetSubtype="0" fill="hold" grpId="0" nodeType="clickEffect">
+                                  <p:stCondLst>
+                                    <p:cond delay="0"/>
+                                  </p:stCondLst>
+                                  <p:childTnLst>
+                                    <p:set>
+                                      <p:cBhvr>
+                                        <p:cTn id="36" dur="1" fill="hold">
+                                          <p:stCondLst>
+                                            <p:cond delay="0"/>
+                                          </p:stCondLst>
+                                        </p:cTn>
+                                        <p:tgtEl>
+                                          <p:spTgt spid="23"/>
+                                        </p:tgtEl>
+                                        <p:attrNameLst>
+                                          <p:attrName>style.visibility</p:attrName>
+                                        </p:attrNameLst>
+                                      </p:cBhvr>
+                                      <p:to>
+                                        <p:strVal val="visible"/>
+                                      </p:to>
+                                    </p:set>
+                                    <p:animEffect transition="in" filter="fade">
+                                      <p:cBhvr>
+                                        <p:cTn id="37" dur="500"/>
+                                        <p:tgtEl>
+                                          <p:spTgt spid="23"/>
+                                        </p:tgtEl>
+                                      </p:cBhvr>
+                                    </p:animEffect>
+                                  </p:childTnLst>
+                                </p:cTn>
+                              </p:par>
+                            </p:childTnLst>
+                          </p:cTn>
+                        </p:par>
+                      </p:childTnLst>
+                    </p:cTn>
+                  </p:par>
+                  <p:par>
+                    <p:cTn id="38" fill="hold">
+                      <p:stCondLst>
+                        <p:cond delay="indefinite"/>
+                      </p:stCondLst>
+                      <p:childTnLst>
+                        <p:par>
+                          <p:cTn id="39" fill="hold">
+                            <p:stCondLst>
+                              <p:cond delay="0"/>
+                            </p:stCondLst>
+                            <p:childTnLst>
+                              <p:par>
+                                <p:cTn id="40" presetID="10" presetClass="entr" presetSubtype="0" fill="hold" grpId="0" nodeType="clickEffect">
+                                  <p:stCondLst>
+                                    <p:cond delay="0"/>
+                                  </p:stCondLst>
+                                  <p:childTnLst>
+                                    <p:set>
+                                      <p:cBhvr>
+                                        <p:cTn id="41" dur="1" fill="hold">
+                                          <p:stCondLst>
+                                            <p:cond delay="0"/>
+                                          </p:stCondLst>
+                                        </p:cTn>
+                                        <p:tgtEl>
+                                          <p:spTgt spid="24"/>
+                                        </p:tgtEl>
+                                        <p:attrNameLst>
+                                          <p:attrName>style.visibility</p:attrName>
+                                        </p:attrNameLst>
+                                      </p:cBhvr>
+                                      <p:to>
+                                        <p:strVal val="visible"/>
+                                      </p:to>
+                                    </p:set>
+                                    <p:animEffect transition="in" filter="fade">
+                                      <p:cBhvr>
+                                        <p:cTn id="42" dur="500"/>
+                                        <p:tgtEl>
+                                          <p:spTgt spid="24"/>
+                                        </p:tgtEl>
+                                      </p:cBhvr>
+                                    </p:animEffect>
+                                  </p:childTnLst>
+                                </p:cTn>
+                              </p:par>
+                            </p:childTnLst>
+                          </p:cTn>
+                        </p:par>
+                      </p:childTnLst>
+                    </p:cTn>
+                  </p:par>
+                  <p:par>
+                    <p:cTn id="43" fill="hold">
+                      <p:stCondLst>
+                        <p:cond delay="indefinite"/>
+                      </p:stCondLst>
+                      <p:childTnLst>
+                        <p:par>
+                          <p:cTn id="44" fill="hold">
+                            <p:stCondLst>
+                              <p:cond delay="0"/>
+                            </p:stCondLst>
+                            <p:childTnLst>
+                              <p:par>
+                                <p:cTn id="45" presetID="10" presetClass="entr" presetSubtype="0" fill="hold" nodeType="clickEffect">
+                                  <p:stCondLst>
+                                    <p:cond delay="0"/>
+                                  </p:stCondLst>
+                                  <p:childTnLst>
+                                    <p:set>
+                                      <p:cBhvr>
+                                        <p:cTn id="46" dur="1" fill="hold">
+                                          <p:stCondLst>
+                                            <p:cond delay="0"/>
+                                          </p:stCondLst>
+                                        </p:cTn>
+                                        <p:tgtEl>
+                                          <p:spTgt spid="26">
+                                            <p:txEl>
+                                              <p:pRg st="0" end="0"/>
+                                            </p:txEl>
+                                          </p:spTgt>
+                                        </p:tgtEl>
+                                        <p:attrNameLst>
+                                          <p:attrName>style.visibility</p:attrName>
+                                        </p:attrNameLst>
+                                      </p:cBhvr>
+                                      <p:to>
+                                        <p:strVal val="visible"/>
+                                      </p:to>
+                                    </p:set>
+                                    <p:animEffect transition="in" filter="fade">
+                                      <p:cBhvr>
+                                        <p:cTn id="47" dur="500"/>
+                                        <p:tgtEl>
+                                          <p:spTgt spid="26">
+                                            <p:txEl>
+                                              <p:pRg st="0" end="0"/>
+                                            </p:txEl>
+                                          </p:spTgt>
+                                        </p:tgtEl>
+                                      </p:cBhvr>
+                                    </p:animEffect>
+                                  </p:childTnLst>
+                                </p:cTn>
+                              </p:par>
+                            </p:childTnLst>
+                          </p:cTn>
+                        </p:par>
+                      </p:childTnLst>
+                    </p:cTn>
+                  </p:par>
+                  <p:par>
+                    <p:cTn id="48" fill="hold">
+                      <p:stCondLst>
+                        <p:cond delay="indefinite"/>
+                      </p:stCondLst>
+                      <p:childTnLst>
+                        <p:par>
+                          <p:cTn id="49" fill="hold">
+                            <p:stCondLst>
+                              <p:cond delay="0"/>
+                            </p:stCondLst>
+                            <p:childTnLst>
+                              <p:par>
+                                <p:cTn id="50" presetID="10" presetClass="entr" presetSubtype="0" fill="hold" grpId="0" nodeType="clickEffect">
+                                  <p:stCondLst>
+                                    <p:cond delay="0"/>
+                                  </p:stCondLst>
+                                  <p:childTnLst>
+                                    <p:set>
+                                      <p:cBhvr>
+                                        <p:cTn id="51" dur="1" fill="hold">
+                                          <p:stCondLst>
+                                            <p:cond delay="0"/>
+                                          </p:stCondLst>
+                                        </p:cTn>
+                                        <p:tgtEl>
+                                          <p:spTgt spid="27"/>
+                                        </p:tgtEl>
+                                        <p:attrNameLst>
+                                          <p:attrName>style.visibility</p:attrName>
+                                        </p:attrNameLst>
+                                      </p:cBhvr>
+                                      <p:to>
+                                        <p:strVal val="visible"/>
+                                      </p:to>
+                                    </p:set>
+                                    <p:animEffect transition="in" filter="fade">
+                                      <p:cBhvr>
+                                        <p:cTn id="52" dur="500"/>
+                                        <p:tgtEl>
+                                          <p:spTgt spid="27"/>
+                                        </p:tgtEl>
+                                      </p:cBhvr>
+                                    </p:animEffect>
+                                  </p:childTnLst>
+                                </p:cTn>
+                              </p:par>
+                            </p:childTnLst>
+                          </p:cTn>
+                        </p:par>
+                      </p:childTnLst>
+                    </p:cTn>
+                  </p:par>
+                </p:childTnLst>
+              </p:cTn>
+              <p:prevCondLst>
+                <p:cond evt="onPrev" delay="0">
+                  <p:tgtEl>
+                    <p:sldTgt/>
+                  </p:tgtEl>
+                </p:cond>
+              </p:prevCondLst>
+              <p:nextCondLst>
+                <p:cond evt="onNext" delay="0">
+                  <p:tgtEl>
+                    <p:sldTgt/>
+                  </p:tgtEl>
+                </p:cond>
+              </p:nextCondLst>
+            </p:seq>
+          </p:childTnLst>
+        </p:cTn>
+      </p:par>
+    </p:tnLst>
+    <p:bldLst>
+      <p:bldP spid="12" grpId="0"/>
+      <p:bldP spid="17" grpId="0"/>
+      <p:bldP spid="18" grpId="0"/>
+      <p:bldP spid="19" grpId="0"/>
+      <p:bldP spid="20" grpId="0"/>
+      <p:bldP spid="23" grpId="0"/>
+      <p:bldP spid="24" grpId="0"/>
+      <p:bldP spid="27" grpId="0"/>
+    </p:bldLst>
+  </p:timing>
+</p:sld>
+</file>
+
+<file path=ppt/slides/slide14.xml><?xml version="1.0" encoding="utf-8"?>
+<p:sld xmlns:a="http://schemas.openxmlformats.org/drawingml/2006/main" xmlns:r="http://schemas.openxmlformats.org/officeDocument/2006/relationships" xmlns:p="http://schemas.openxmlformats.org/presentationml/2006/main">
+  <p:cSld>
+    <p:spTree>
+      <p:nvGrpSpPr>
+        <p:cNvPr id="1" name=""/>
+        <p:cNvGrpSpPr/>
+        <p:nvPr/>
+      </p:nvGrpSpPr>
+      <p:grpSpPr>
+        <a:xfrm>
+          <a:off x="0" y="0"/>
+          <a:ext cx="0" cy="0"/>
+          <a:chOff x="0" y="0"/>
+          <a:chExt cx="0" cy="0"/>
+        </a:xfrm>
+      </p:grpSpPr>
+      <p:sp>
+        <p:nvSpPr>
           <p:cNvPr id="3" name="Content Placeholder 2"/>
           <p:cNvSpPr>
             <a:spLocks noGrp="1"/>
@@ -8232,7 +10681,7 @@
 </p:sld>
 </file>
 
-<file path=ppt/slides/slide14.xml><?xml version="1.0" encoding="utf-8"?>
+<file path=ppt/slides/slide15.xml><?xml version="1.0" encoding="utf-8"?>
 <p:sld xmlns:a="http://schemas.openxmlformats.org/drawingml/2006/main" xmlns:r="http://schemas.openxmlformats.org/officeDocument/2006/relationships" xmlns:p="http://schemas.openxmlformats.org/presentationml/2006/main">
   <p:cSld>
     <p:spTree>
@@ -10117,7 +12566,7 @@
 </p:sld>
 </file>
 
-<file path=ppt/slides/slide15.xml><?xml version="1.0" encoding="utf-8"?>
+<file path=ppt/slides/slide16.xml><?xml version="1.0" encoding="utf-8"?>
 <p:sld xmlns:a="http://schemas.openxmlformats.org/drawingml/2006/main" xmlns:r="http://schemas.openxmlformats.org/officeDocument/2006/relationships" xmlns:p="http://schemas.openxmlformats.org/presentationml/2006/main">
   <p:cSld>
     <p:spTree>
@@ -11342,7 +13791,7 @@
 </p:sld>
 </file>
 
-<file path=ppt/slides/slide16.xml><?xml version="1.0" encoding="utf-8"?>
+<file path=ppt/slides/slide17.xml><?xml version="1.0" encoding="utf-8"?>
 <p:sld xmlns:a="http://schemas.openxmlformats.org/drawingml/2006/main" xmlns:r="http://schemas.openxmlformats.org/officeDocument/2006/relationships" xmlns:p="http://schemas.openxmlformats.org/presentationml/2006/main">
   <p:cSld>
     <p:spTree>
@@ -11972,7 +14421,7 @@
         </p:nvSpPr>
         <p:spPr>
           <a:xfrm>
-            <a:off x="5430530" y="5499677"/>
+            <a:off x="3569633" y="5543320"/>
             <a:ext cx="1624084" cy="523220"/>
           </a:xfrm>
           <a:prstGeom prst="rect">
@@ -11998,8 +14447,8 @@
           </a:p>
         </p:txBody>
       </p:sp>
-      <mc:AlternateContent xmlns:mc="http://schemas.openxmlformats.org/markup-compatibility/2006" xmlns:a14="http://schemas.microsoft.com/office/drawing/2010/main">
-        <mc:Choice Requires="a14">
+      <mc:AlternateContent xmlns:mc="http://schemas.openxmlformats.org/markup-compatibility/2006">
+        <mc:Choice xmlns:a14="http://schemas.microsoft.com/office/drawing/2010/main" Requires="a14">
           <p:sp>
             <p:nvSpPr>
               <p:cNvPr id="14" name="TextBox 13"/>
@@ -12008,7 +14457,7 @@
             </p:nvSpPr>
             <p:spPr>
               <a:xfrm>
-                <a:off x="8114339" y="5499677"/>
+                <a:off x="5265018" y="5487534"/>
                 <a:ext cx="436728" cy="809452"/>
               </a:xfrm>
               <a:prstGeom prst="rect">
@@ -12071,7 +14520,7 @@
             </p:txBody>
           </p:sp>
         </mc:Choice>
-        <mc:Fallback xmlns="">
+        <mc:Fallback>
           <p:sp>
             <p:nvSpPr>
               <p:cNvPr id="14" name="TextBox 13"/>
@@ -12082,7 +14531,7 @@
             </p:nvSpPr>
             <p:spPr>
               <a:xfrm>
-                <a:off x="8114339" y="5499677"/>
+                <a:off x="5265018" y="5487534"/>
                 <a:ext cx="436728" cy="809452"/>
               </a:xfrm>
               <a:prstGeom prst="rect">
@@ -12144,8 +14593,8 @@
           </a:p>
         </p:txBody>
       </p:sp>
-      <mc:AlternateContent xmlns:mc="http://schemas.openxmlformats.org/markup-compatibility/2006" xmlns:a14="http://schemas.microsoft.com/office/drawing/2010/main">
-        <mc:Choice Requires="a14">
+      <mc:AlternateContent xmlns:mc="http://schemas.openxmlformats.org/markup-compatibility/2006">
+        <mc:Choice xmlns:a14="http://schemas.microsoft.com/office/drawing/2010/main" Requires="a14">
           <p:sp>
             <p:nvSpPr>
               <p:cNvPr id="17" name="TextBox 16">
@@ -12160,7 +14609,7 @@
             </p:nvSpPr>
             <p:spPr>
               <a:xfrm>
-                <a:off x="4342115" y="5499677"/>
+                <a:off x="1295588" y="5401615"/>
                 <a:ext cx="459476" cy="806631"/>
               </a:xfrm>
               <a:prstGeom prst="rect">
@@ -12223,7 +14672,7 @@
             </p:txBody>
           </p:sp>
         </mc:Choice>
-        <mc:Fallback xmlns="">
+        <mc:Fallback>
           <p:sp>
             <p:nvSpPr>
               <p:cNvPr id="17" name="TextBox 16">
@@ -12240,7 +14689,7 @@
             </p:nvSpPr>
             <p:spPr>
               <a:xfrm>
-                <a:off x="4342115" y="5499677"/>
+                <a:off x="1295588" y="5401615"/>
                 <a:ext cx="459476" cy="806631"/>
               </a:xfrm>
               <a:prstGeom prst="rect">
@@ -12895,7 +15344,7 @@
 </p:sld>
 </file>
 
-<file path=ppt/slides/slide17.xml><?xml version="1.0" encoding="utf-8"?>
+<file path=ppt/slides/slide18.xml><?xml version="1.0" encoding="utf-8"?>
 <p:sld xmlns:a="http://schemas.openxmlformats.org/drawingml/2006/main" xmlns:r="http://schemas.openxmlformats.org/officeDocument/2006/relationships" xmlns:p="http://schemas.openxmlformats.org/presentationml/2006/main">
   <p:cSld>
     <p:spTree>
@@ -13443,7 +15892,7 @@
 </p:sld>
 </file>
 
-<file path=ppt/slides/slide18.xml><?xml version="1.0" encoding="utf-8"?>
+<file path=ppt/slides/slide19.xml><?xml version="1.0" encoding="utf-8"?>
 <p:sld xmlns:a="http://schemas.openxmlformats.org/drawingml/2006/main" xmlns:r="http://schemas.openxmlformats.org/officeDocument/2006/relationships" xmlns:p="http://schemas.openxmlformats.org/presentationml/2006/main">
   <p:cSld>
     <p:spTree>
